--- a/presentation/XeersLead-architecture-slides.pptx
+++ b/presentation/XeersLead-architecture-slides.pptx
@@ -5458,7 +5458,7 @@
                 <a:ea typeface="Calibri" pitchFamily="34" charset="-122"/>
                 <a:cs typeface="Calibri" pitchFamily="34" charset="-120"/>
               </a:rPr>
-              <a:t>SLIDE  ·  SYSTEM DESIGN</a:t>
+              <a:t>SLIDE  ·  A LOOK UNDER THE HOOD</a:t>
             </a:r>
             <a:endParaRPr lang="en-US" sz="1100" dirty="0"/>
           </a:p>
@@ -5497,7 +5497,7 @@
                 <a:ea typeface="Calibri" pitchFamily="34" charset="-122"/>
                 <a:cs typeface="Calibri" pitchFamily="34" charset="-120"/>
               </a:rPr>
-              <a:t>System architecture</a:t>
+              <a:t>How the system works</a:t>
             </a:r>
             <a:endParaRPr lang="en-US" sz="2600" dirty="0"/>
           </a:p>
@@ -5587,7 +5587,7 @@
               <a:buNone/>
             </a:pPr>
             <a:r>
-              <a:rPr lang="en-US" sz="1200" dirty="0">
+              <a:rPr lang="en-US" sz="1300" dirty="0">
                 <a:solidFill>
                   <a:srgbClr val="5B6170"/>
                 </a:solidFill>
@@ -5595,9 +5595,9 @@
                 <a:ea typeface="Calibri" pitchFamily="34" charset="-122"/>
                 <a:cs typeface="Calibri" pitchFamily="34" charset="-120"/>
               </a:rPr>
-              <a:t>Next.js full-stack on Vercel · Prisma over PostgreSQL (Neon) · WhatsApp click-to-chat (ADR-0002)</a:t>
-            </a:r>
-            <a:endParaRPr lang="en-US" sz="1200" dirty="0"/>
+              <a:t>Three groups of people. One app. One clear record of what happened.</a:t>
+            </a:r>
+            <a:endParaRPr lang="en-US" sz="1300" dirty="0"/>
           </a:p>
         </p:txBody>
       </p:sp>
@@ -5610,11 +5610,11 @@
         <p:spPr>
           <a:xfrm>
             <a:off x="457200" y="1828800"/>
-            <a:ext cx="2651760" cy="3566160"/>
+            <a:ext cx="2788920" cy="3383280"/>
           </a:xfrm>
           <a:prstGeom prst="rect">
             <a:avLst>
-              <a:gd name="adj" fmla="val 2759"/>
+              <a:gd name="adj" fmla="val 2623"/>
             </a:avLst>
           </a:prstGeom>
           <a:solidFill>
@@ -5637,7 +5637,7 @@
         <p:spPr>
           <a:xfrm>
             <a:off x="457200" y="1828800"/>
-            <a:ext cx="2651760" cy="109728"/>
+            <a:ext cx="2788920" cy="109728"/>
           </a:xfrm>
           <a:prstGeom prst="rect">
             <a:avLst>
@@ -5645,7 +5645,7 @@
             </a:avLst>
           </a:prstGeom>
           <a:solidFill>
-            <a:srgbClr val="2F6FED"/>
+            <a:srgbClr val="4A45E0"/>
           </a:solidFill>
           <a:ln/>
         </p:spPr>
@@ -5659,7 +5659,7 @@
         <p:spPr>
           <a:xfrm>
             <a:off x="621792" y="1975104"/>
-            <a:ext cx="2322576" cy="329184"/>
+            <a:ext cx="2459736" cy="329184"/>
           </a:xfrm>
           <a:prstGeom prst="rect">
             <a:avLst/>
@@ -5683,7 +5683,7 @@
                 <a:ea typeface="Calibri" pitchFamily="34" charset="-122"/>
                 <a:cs typeface="Calibri" pitchFamily="34" charset="-120"/>
               </a:rPr>
-              <a:t>CLIENT (BROWSER)</a:t>
+              <a:t>THE TEAM</a:t>
             </a:r>
             <a:endParaRPr lang="en-US" sz="1200" dirty="0"/>
           </a:p>
@@ -5697,8 +5697,8 @@
         </p:nvSpPr>
         <p:spPr>
           <a:xfrm>
-            <a:off x="621792" y="2450592"/>
-            <a:ext cx="100584" cy="100584"/>
+            <a:off x="640080" y="2468880"/>
+            <a:ext cx="384048" cy="384048"/>
           </a:xfrm>
           <a:prstGeom prst="ellipse">
             <a:avLst/>
@@ -5717,24 +5717,24 @@
         </p:nvSpPr>
         <p:spPr>
           <a:xfrm>
-            <a:off x="804672" y="2395728"/>
-            <a:ext cx="2194560" cy="256032"/>
-          </a:xfrm>
-          <a:prstGeom prst="rect">
-            <a:avLst/>
-          </a:prstGeom>
-          <a:noFill/>
-          <a:ln/>
-        </p:spPr>
-        <p:txBody>
-          <a:bodyPr wrap="square" rtlCol="0" anchor="ctr"/>
-          <a:lstStyle/>
-          <a:p>
-            <a:pPr indent="0" marL="0">
-              <a:buNone/>
-            </a:pPr>
-            <a:r>
-              <a:rPr lang="en-US" sz="1100" b="1" dirty="0">
+            <a:off x="1115568" y="2423160"/>
+            <a:ext cx="2011680" cy="274320"/>
+          </a:xfrm>
+          <a:prstGeom prst="rect">
+            <a:avLst/>
+          </a:prstGeom>
+          <a:noFill/>
+          <a:ln/>
+        </p:spPr>
+        <p:txBody>
+          <a:bodyPr wrap="square" rtlCol="0" anchor="ctr"/>
+          <a:lstStyle/>
+          <a:p>
+            <a:pPr indent="0" marL="0">
+              <a:buNone/>
+            </a:pPr>
+            <a:r>
+              <a:rPr lang="en-US" sz="1300" b="1" dirty="0">
                 <a:solidFill>
                   <a:srgbClr val="1C1F27"/>
                 </a:solidFill>
@@ -5742,9 +5742,9 @@
                 <a:ea typeface="Calibri" pitchFamily="34" charset="-122"/>
                 <a:cs typeface="Calibri" pitchFamily="34" charset="-120"/>
               </a:rPr>
-              <a:t>React server components</a:t>
-            </a:r>
-            <a:endParaRPr lang="en-US" sz="1100" dirty="0"/>
+              <a:t>Admin</a:t>
+            </a:r>
+            <a:endParaRPr lang="en-US" sz="1300" dirty="0"/>
           </a:p>
         </p:txBody>
       </p:sp>
@@ -5756,24 +5756,24 @@
         </p:nvSpPr>
         <p:spPr>
           <a:xfrm>
-            <a:off x="804672" y="2651760"/>
-            <a:ext cx="2194560" cy="256032"/>
-          </a:xfrm>
-          <a:prstGeom prst="rect">
-            <a:avLst/>
-          </a:prstGeom>
-          <a:noFill/>
-          <a:ln/>
-        </p:spPr>
-        <p:txBody>
-          <a:bodyPr wrap="square" rtlCol="0" anchor="ctr"/>
-          <a:lstStyle/>
-          <a:p>
-            <a:pPr indent="0" marL="0">
-              <a:buNone/>
-            </a:pPr>
-            <a:r>
-              <a:rPr lang="en-US" sz="950" i="1" dirty="0">
+            <a:off x="1115568" y="2697480"/>
+            <a:ext cx="2011680" cy="457200"/>
+          </a:xfrm>
+          <a:prstGeom prst="rect">
+            <a:avLst/>
+          </a:prstGeom>
+          <a:noFill/>
+          <a:ln/>
+        </p:spPr>
+        <p:txBody>
+          <a:bodyPr wrap="square" rtlCol="0" anchor="t"/>
+          <a:lstStyle/>
+          <a:p>
+            <a:pPr indent="0" marL="0">
+              <a:buNone/>
+            </a:pPr>
+            <a:r>
+              <a:rPr lang="en-US" sz="950" dirty="0">
                 <a:solidFill>
                   <a:srgbClr val="5B6170"/>
                 </a:solidFill>
@@ -5781,7 +5781,7 @@
                 <a:ea typeface="Calibri" pitchFamily="34" charset="-122"/>
                 <a:cs typeface="Calibri" pitchFamily="34" charset="-120"/>
               </a:rPr>
-              <a:t>role-scoped dashboard, leads, reports</a:t>
+              <a:t>Runs the account · manages users</a:t>
             </a:r>
             <a:endParaRPr lang="en-US" sz="950" dirty="0"/>
           </a:p>
@@ -5795,8 +5795,270 @@
         </p:nvSpPr>
         <p:spPr>
           <a:xfrm>
-            <a:off x="621792" y="2999232"/>
-            <a:ext cx="100584" cy="100584"/>
+            <a:off x="640080" y="3337560"/>
+            <a:ext cx="384048" cy="384048"/>
+          </a:xfrm>
+          <a:prstGeom prst="ellipse">
+            <a:avLst/>
+          </a:prstGeom>
+          <a:solidFill>
+            <a:srgbClr val="0E9AA7"/>
+          </a:solidFill>
+          <a:ln/>
+        </p:spPr>
+      </p:sp>
+      <p:sp>
+        <p:nvSpPr>
+          <p:cNvPr id="15" name="Text 13"/>
+          <p:cNvSpPr/>
+          <p:nvPr/>
+        </p:nvSpPr>
+        <p:spPr>
+          <a:xfrm>
+            <a:off x="1115568" y="3291840"/>
+            <a:ext cx="2011680" cy="274320"/>
+          </a:xfrm>
+          <a:prstGeom prst="rect">
+            <a:avLst/>
+          </a:prstGeom>
+          <a:noFill/>
+          <a:ln/>
+        </p:spPr>
+        <p:txBody>
+          <a:bodyPr wrap="square" rtlCol="0" anchor="ctr"/>
+          <a:lstStyle/>
+          <a:p>
+            <a:pPr indent="0" marL="0">
+              <a:buNone/>
+            </a:pPr>
+            <a:r>
+              <a:rPr lang="en-US" sz="1300" b="1" dirty="0">
+                <a:solidFill>
+                  <a:srgbClr val="1C1F27"/>
+                </a:solidFill>
+                <a:latin typeface="Calibri" pitchFamily="34" charset="0"/>
+                <a:ea typeface="Calibri" pitchFamily="34" charset="-122"/>
+                <a:cs typeface="Calibri" pitchFamily="34" charset="-120"/>
+              </a:rPr>
+              <a:t>Manager</a:t>
+            </a:r>
+            <a:endParaRPr lang="en-US" sz="1300" dirty="0"/>
+          </a:p>
+        </p:txBody>
+      </p:sp>
+      <p:sp>
+        <p:nvSpPr>
+          <p:cNvPr id="16" name="Text 14"/>
+          <p:cNvSpPr/>
+          <p:nvPr/>
+        </p:nvSpPr>
+        <p:spPr>
+          <a:xfrm>
+            <a:off x="1115568" y="3566160"/>
+            <a:ext cx="2011680" cy="457200"/>
+          </a:xfrm>
+          <a:prstGeom prst="rect">
+            <a:avLst/>
+          </a:prstGeom>
+          <a:noFill/>
+          <a:ln/>
+        </p:spPr>
+        <p:txBody>
+          <a:bodyPr wrap="square" rtlCol="0" anchor="t"/>
+          <a:lstStyle/>
+          <a:p>
+            <a:pPr indent="0" marL="0">
+              <a:buNone/>
+            </a:pPr>
+            <a:r>
+              <a:rPr lang="en-US" sz="950" dirty="0">
+                <a:solidFill>
+                  <a:srgbClr val="5B6170"/>
+                </a:solidFill>
+                <a:latin typeface="Calibri" pitchFamily="34" charset="0"/>
+                <a:ea typeface="Calibri" pitchFamily="34" charset="-122"/>
+                <a:cs typeface="Calibri" pitchFamily="34" charset="-120"/>
+              </a:rPr>
+              <a:t>Owns the pipeline · assigns leads · reviews reports</a:t>
+            </a:r>
+            <a:endParaRPr lang="en-US" sz="950" dirty="0"/>
+          </a:p>
+        </p:txBody>
+      </p:sp>
+      <p:sp>
+        <p:nvSpPr>
+          <p:cNvPr id="17" name="Shape 15"/>
+          <p:cNvSpPr/>
+          <p:nvPr/>
+        </p:nvSpPr>
+        <p:spPr>
+          <a:xfrm>
+            <a:off x="640080" y="4206240"/>
+            <a:ext cx="384048" cy="384048"/>
+          </a:xfrm>
+          <a:prstGeom prst="ellipse">
+            <a:avLst/>
+          </a:prstGeom>
+          <a:solidFill>
+            <a:srgbClr val="D98A0B"/>
+          </a:solidFill>
+          <a:ln/>
+        </p:spPr>
+      </p:sp>
+      <p:sp>
+        <p:nvSpPr>
+          <p:cNvPr id="18" name="Text 16"/>
+          <p:cNvSpPr/>
+          <p:nvPr/>
+        </p:nvSpPr>
+        <p:spPr>
+          <a:xfrm>
+            <a:off x="1115568" y="4160520"/>
+            <a:ext cx="2011680" cy="274320"/>
+          </a:xfrm>
+          <a:prstGeom prst="rect">
+            <a:avLst/>
+          </a:prstGeom>
+          <a:noFill/>
+          <a:ln/>
+        </p:spPr>
+        <p:txBody>
+          <a:bodyPr wrap="square" rtlCol="0" anchor="ctr"/>
+          <a:lstStyle/>
+          <a:p>
+            <a:pPr indent="0" marL="0">
+              <a:buNone/>
+            </a:pPr>
+            <a:r>
+              <a:rPr lang="en-US" sz="1300" b="1" dirty="0">
+                <a:solidFill>
+                  <a:srgbClr val="1C1F27"/>
+                </a:solidFill>
+                <a:latin typeface="Calibri" pitchFamily="34" charset="0"/>
+                <a:ea typeface="Calibri" pitchFamily="34" charset="-122"/>
+                <a:cs typeface="Calibri" pitchFamily="34" charset="-120"/>
+              </a:rPr>
+              <a:t>Sales Rep</a:t>
+            </a:r>
+            <a:endParaRPr lang="en-US" sz="1300" dirty="0"/>
+          </a:p>
+        </p:txBody>
+      </p:sp>
+      <p:sp>
+        <p:nvSpPr>
+          <p:cNvPr id="19" name="Text 17"/>
+          <p:cNvSpPr/>
+          <p:nvPr/>
+        </p:nvSpPr>
+        <p:spPr>
+          <a:xfrm>
+            <a:off x="1115568" y="4434840"/>
+            <a:ext cx="2011680" cy="457200"/>
+          </a:xfrm>
+          <a:prstGeom prst="rect">
+            <a:avLst/>
+          </a:prstGeom>
+          <a:noFill/>
+          <a:ln/>
+        </p:spPr>
+        <p:txBody>
+          <a:bodyPr wrap="square" rtlCol="0" anchor="t"/>
+          <a:lstStyle/>
+          <a:p>
+            <a:pPr indent="0" marL="0">
+              <a:buNone/>
+            </a:pPr>
+            <a:r>
+              <a:rPr lang="en-US" sz="950" dirty="0">
+                <a:solidFill>
+                  <a:srgbClr val="5B6170"/>
+                </a:solidFill>
+                <a:latin typeface="Calibri" pitchFamily="34" charset="0"/>
+                <a:ea typeface="Calibri" pitchFamily="34" charset="-122"/>
+                <a:cs typeface="Calibri" pitchFamily="34" charset="-120"/>
+              </a:rPr>
+              <a:t>Works assigned leads · updates status · WhatsApps</a:t>
+            </a:r>
+            <a:endParaRPr lang="en-US" sz="950" dirty="0"/>
+          </a:p>
+        </p:txBody>
+      </p:sp>
+      <p:sp>
+        <p:nvSpPr>
+          <p:cNvPr id="20" name="Shape 18"/>
+          <p:cNvSpPr/>
+          <p:nvPr/>
+        </p:nvSpPr>
+        <p:spPr>
+          <a:xfrm>
+            <a:off x="3749040" y="1828800"/>
+            <a:ext cx="4709160" cy="3383280"/>
+          </a:xfrm>
+          <a:prstGeom prst="rect">
+            <a:avLst>
+              <a:gd name="adj" fmla="val 2162"/>
+            </a:avLst>
+          </a:prstGeom>
+          <a:solidFill>
+            <a:srgbClr val="ECEBFB"/>
+          </a:solidFill>
+          <a:ln w="19050">
+            <a:solidFill>
+              <a:srgbClr val="4A45E0"/>
+            </a:solidFill>
+            <a:prstDash val="solid"/>
+          </a:ln>
+        </p:spPr>
+      </p:sp>
+      <p:sp>
+        <p:nvSpPr>
+          <p:cNvPr id="21" name="Text 19"/>
+          <p:cNvSpPr/>
+          <p:nvPr/>
+        </p:nvSpPr>
+        <p:spPr>
+          <a:xfrm>
+            <a:off x="3950208" y="1975104"/>
+            <a:ext cx="4306824" cy="329184"/>
+          </a:xfrm>
+          <a:prstGeom prst="rect">
+            <a:avLst/>
+          </a:prstGeom>
+          <a:noFill/>
+          <a:ln/>
+        </p:spPr>
+        <p:txBody>
+          <a:bodyPr wrap="square" rtlCol="0" anchor="ctr"/>
+          <a:lstStyle/>
+          <a:p>
+            <a:pPr indent="0" marL="0">
+              <a:buNone/>
+            </a:pPr>
+            <a:r>
+              <a:rPr lang="en-US" sz="1300" b="1" spc="150" kern="0" dirty="0">
+                <a:solidFill>
+                  <a:srgbClr val="4A45E0"/>
+                </a:solidFill>
+                <a:latin typeface="Calibri" pitchFamily="34" charset="0"/>
+                <a:ea typeface="Calibri" pitchFamily="34" charset="-122"/>
+                <a:cs typeface="Calibri" pitchFamily="34" charset="-120"/>
+              </a:rPr>
+              <a:t>LEADWAY  ·  THE APP</a:t>
+            </a:r>
+            <a:endParaRPr lang="en-US" sz="1300" dirty="0"/>
+          </a:p>
+        </p:txBody>
+      </p:sp>
+      <p:sp>
+        <p:nvSpPr>
+          <p:cNvPr id="22" name="Shape 20"/>
+          <p:cNvSpPr/>
+          <p:nvPr/>
+        </p:nvSpPr>
+        <p:spPr>
+          <a:xfrm>
+            <a:off x="4005072" y="2542032"/>
+            <a:ext cx="128016" cy="128016"/>
           </a:xfrm>
           <a:prstGeom prst="ellipse">
             <a:avLst/>
@@ -5809,30 +6071,30 @@
       </p:sp>
       <p:sp>
         <p:nvSpPr>
-          <p:cNvPr id="15" name="Text 13"/>
-          <p:cNvSpPr/>
-          <p:nvPr/>
-        </p:nvSpPr>
-        <p:spPr>
-          <a:xfrm>
-            <a:off x="804672" y="2944368"/>
-            <a:ext cx="2194560" cy="256032"/>
-          </a:xfrm>
-          <a:prstGeom prst="rect">
-            <a:avLst/>
-          </a:prstGeom>
-          <a:noFill/>
-          <a:ln/>
-        </p:spPr>
-        <p:txBody>
-          <a:bodyPr wrap="square" rtlCol="0" anchor="ctr"/>
-          <a:lstStyle/>
-          <a:p>
-            <a:pPr indent="0" marL="0">
-              <a:buNone/>
-            </a:pPr>
-            <a:r>
-              <a:rPr lang="en-US" sz="1100" b="1" dirty="0">
+          <p:cNvPr id="23" name="Text 21"/>
+          <p:cNvSpPr/>
+          <p:nvPr/>
+        </p:nvSpPr>
+        <p:spPr>
+          <a:xfrm>
+            <a:off x="4251960" y="2468880"/>
+            <a:ext cx="4069080" cy="274320"/>
+          </a:xfrm>
+          <a:prstGeom prst="rect">
+            <a:avLst/>
+          </a:prstGeom>
+          <a:noFill/>
+          <a:ln/>
+        </p:spPr>
+        <p:txBody>
+          <a:bodyPr wrap="square" rtlCol="0" anchor="ctr"/>
+          <a:lstStyle/>
+          <a:p>
+            <a:pPr indent="0" marL="0">
+              <a:buNone/>
+            </a:pPr>
+            <a:r>
+              <a:rPr lang="en-US" sz="1200" b="1" dirty="0">
                 <a:solidFill>
                   <a:srgbClr val="1C1F27"/>
                 </a:solidFill>
@@ -5840,38 +6102,38 @@
                 <a:ea typeface="Calibri" pitchFamily="34" charset="-122"/>
                 <a:cs typeface="Calibri" pitchFamily="34" charset="-120"/>
               </a:rPr>
-              <a:t>Client components</a:t>
-            </a:r>
-            <a:endParaRPr lang="en-US" sz="1100" dirty="0"/>
-          </a:p>
-        </p:txBody>
-      </p:sp>
-      <p:sp>
-        <p:nvSpPr>
-          <p:cNvPr id="16" name="Text 14"/>
-          <p:cNvSpPr/>
-          <p:nvPr/>
-        </p:nvSpPr>
-        <p:spPr>
-          <a:xfrm>
-            <a:off x="804672" y="3200400"/>
-            <a:ext cx="2194560" cy="256032"/>
-          </a:xfrm>
-          <a:prstGeom prst="rect">
-            <a:avLst/>
-          </a:prstGeom>
-          <a:noFill/>
-          <a:ln/>
-        </p:spPr>
-        <p:txBody>
-          <a:bodyPr wrap="square" rtlCol="0" anchor="ctr"/>
-          <a:lstStyle/>
-          <a:p>
-            <a:pPr indent="0" marL="0">
-              <a:buNone/>
-            </a:pPr>
-            <a:r>
-              <a:rPr lang="en-US" sz="950" i="1" dirty="0">
+              <a:t>Shows each person only what they should see</a:t>
+            </a:r>
+            <a:endParaRPr lang="en-US" sz="1200" dirty="0"/>
+          </a:p>
+        </p:txBody>
+      </p:sp>
+      <p:sp>
+        <p:nvSpPr>
+          <p:cNvPr id="24" name="Text 22"/>
+          <p:cNvSpPr/>
+          <p:nvPr/>
+        </p:nvSpPr>
+        <p:spPr>
+          <a:xfrm>
+            <a:off x="4251960" y="2743200"/>
+            <a:ext cx="4069080" cy="256032"/>
+          </a:xfrm>
+          <a:prstGeom prst="rect">
+            <a:avLst/>
+          </a:prstGeom>
+          <a:noFill/>
+          <a:ln/>
+        </p:spPr>
+        <p:txBody>
+          <a:bodyPr wrap="square" rtlCol="0" anchor="ctr"/>
+          <a:lstStyle/>
+          <a:p>
+            <a:pPr indent="0" marL="0">
+              <a:buNone/>
+            </a:pPr>
+            <a:r>
+              <a:rPr lang="en-US" sz="1000" i="1" dirty="0">
                 <a:solidFill>
                   <a:srgbClr val="5B6170"/>
                 </a:solidFill>
@@ -5879,22 +6141,22 @@
                 <a:ea typeface="Calibri" pitchFamily="34" charset="-122"/>
                 <a:cs typeface="Calibri" pitchFamily="34" charset="-120"/>
               </a:rPr>
-              <a:t>dialogs, dropdowns, motion</a:t>
-            </a:r>
-            <a:endParaRPr lang="en-US" sz="950" dirty="0"/>
-          </a:p>
-        </p:txBody>
-      </p:sp>
-      <p:sp>
-        <p:nvSpPr>
-          <p:cNvPr id="17" name="Shape 15"/>
-          <p:cNvSpPr/>
-          <p:nvPr/>
-        </p:nvSpPr>
-        <p:spPr>
-          <a:xfrm>
-            <a:off x="621792" y="3547872"/>
-            <a:ext cx="100584" cy="100584"/>
+              <a:t>reps see their own leads · managers see the team</a:t>
+            </a:r>
+            <a:endParaRPr lang="en-US" sz="1000" dirty="0"/>
+          </a:p>
+        </p:txBody>
+      </p:sp>
+      <p:sp>
+        <p:nvSpPr>
+          <p:cNvPr id="25" name="Shape 23"/>
+          <p:cNvSpPr/>
+          <p:nvPr/>
+        </p:nvSpPr>
+        <p:spPr>
+          <a:xfrm>
+            <a:off x="4005072" y="3182112"/>
+            <a:ext cx="128016" cy="128016"/>
           </a:xfrm>
           <a:prstGeom prst="ellipse">
             <a:avLst/>
@@ -5907,30 +6169,30 @@
       </p:sp>
       <p:sp>
         <p:nvSpPr>
-          <p:cNvPr id="18" name="Text 16"/>
-          <p:cNvSpPr/>
-          <p:nvPr/>
-        </p:nvSpPr>
-        <p:spPr>
-          <a:xfrm>
-            <a:off x="804672" y="3493008"/>
-            <a:ext cx="2194560" cy="256032"/>
-          </a:xfrm>
-          <a:prstGeom prst="rect">
-            <a:avLst/>
-          </a:prstGeom>
-          <a:noFill/>
-          <a:ln/>
-        </p:spPr>
-        <p:txBody>
-          <a:bodyPr wrap="square" rtlCol="0" anchor="ctr"/>
-          <a:lstStyle/>
-          <a:p>
-            <a:pPr indent="0" marL="0">
-              <a:buNone/>
-            </a:pPr>
-            <a:r>
-              <a:rPr lang="en-US" sz="1100" b="1" dirty="0">
+          <p:cNvPr id="26" name="Text 24"/>
+          <p:cNvSpPr/>
+          <p:nvPr/>
+        </p:nvSpPr>
+        <p:spPr>
+          <a:xfrm>
+            <a:off x="4251960" y="3108960"/>
+            <a:ext cx="4069080" cy="274320"/>
+          </a:xfrm>
+          <a:prstGeom prst="rect">
+            <a:avLst/>
+          </a:prstGeom>
+          <a:noFill/>
+          <a:ln/>
+        </p:spPr>
+        <p:txBody>
+          <a:bodyPr wrap="square" rtlCol="0" anchor="ctr"/>
+          <a:lstStyle/>
+          <a:p>
+            <a:pPr indent="0" marL="0">
+              <a:buNone/>
+            </a:pPr>
+            <a:r>
+              <a:rPr lang="en-US" sz="1200" b="1" dirty="0">
                 <a:solidFill>
                   <a:srgbClr val="1C1F27"/>
                 </a:solidFill>
@@ -5938,38 +6200,38 @@
                 <a:ea typeface="Calibri" pitchFamily="34" charset="-122"/>
                 <a:cs typeface="Calibri" pitchFamily="34" charset="-120"/>
               </a:rPr>
-              <a:t>Custom Dropdown, Modal</a:t>
-            </a:r>
-            <a:endParaRPr lang="en-US" sz="1100" dirty="0"/>
-          </a:p>
-        </p:txBody>
-      </p:sp>
-      <p:sp>
-        <p:nvSpPr>
-          <p:cNvPr id="19" name="Text 17"/>
-          <p:cNvSpPr/>
-          <p:nvPr/>
-        </p:nvSpPr>
-        <p:spPr>
-          <a:xfrm>
-            <a:off x="804672" y="3749040"/>
-            <a:ext cx="2194560" cy="256032"/>
-          </a:xfrm>
-          <a:prstGeom prst="rect">
-            <a:avLst/>
-          </a:prstGeom>
-          <a:noFill/>
-          <a:ln/>
-        </p:spPr>
-        <p:txBody>
-          <a:bodyPr wrap="square" rtlCol="0" anchor="ctr"/>
-          <a:lstStyle/>
-          <a:p>
-            <a:pPr indent="0" marL="0">
-              <a:buNone/>
-            </a:pPr>
-            <a:r>
-              <a:rPr lang="en-US" sz="950" i="1" dirty="0">
+              <a:t>Only allows the right next step in the pipeline</a:t>
+            </a:r>
+            <a:endParaRPr lang="en-US" sz="1200" dirty="0"/>
+          </a:p>
+        </p:txBody>
+      </p:sp>
+      <p:sp>
+        <p:nvSpPr>
+          <p:cNvPr id="27" name="Text 25"/>
+          <p:cNvSpPr/>
+          <p:nvPr/>
+        </p:nvSpPr>
+        <p:spPr>
+          <a:xfrm>
+            <a:off x="4251960" y="3383280"/>
+            <a:ext cx="4069080" cy="256032"/>
+          </a:xfrm>
+          <a:prstGeom prst="rect">
+            <a:avLst/>
+          </a:prstGeom>
+          <a:noFill/>
+          <a:ln/>
+        </p:spPr>
+        <p:txBody>
+          <a:bodyPr wrap="square" rtlCol="0" anchor="ctr"/>
+          <a:lstStyle/>
+          <a:p>
+            <a:pPr indent="0" marL="0">
+              <a:buNone/>
+            </a:pPr>
+            <a:r>
+              <a:rPr lang="en-US" sz="1000" i="1" dirty="0">
                 <a:solidFill>
                   <a:srgbClr val="5B6170"/>
                 </a:solidFill>
@@ -5977,22 +6239,22 @@
                 <a:ea typeface="Calibri" pitchFamily="34" charset="-122"/>
                 <a:cs typeface="Calibri" pitchFamily="34" charset="-120"/>
               </a:rPr>
-              <a:t>no native selects app-wide</a:t>
-            </a:r>
-            <a:endParaRPr lang="en-US" sz="950" dirty="0"/>
-          </a:p>
-        </p:txBody>
-      </p:sp>
-      <p:sp>
-        <p:nvSpPr>
-          <p:cNvPr id="20" name="Shape 18"/>
-          <p:cNvSpPr/>
-          <p:nvPr/>
-        </p:nvSpPr>
-        <p:spPr>
-          <a:xfrm>
-            <a:off x="621792" y="4096512"/>
-            <a:ext cx="100584" cy="100584"/>
+              <a:t>no skipping — one stage forward at a time</a:t>
+            </a:r>
+            <a:endParaRPr lang="en-US" sz="1000" dirty="0"/>
+          </a:p>
+        </p:txBody>
+      </p:sp>
+      <p:sp>
+        <p:nvSpPr>
+          <p:cNvPr id="28" name="Shape 26"/>
+          <p:cNvSpPr/>
+          <p:nvPr/>
+        </p:nvSpPr>
+        <p:spPr>
+          <a:xfrm>
+            <a:off x="4005072" y="3822192"/>
+            <a:ext cx="128016" cy="128016"/>
           </a:xfrm>
           <a:prstGeom prst="ellipse">
             <a:avLst/>
@@ -6005,30 +6267,30 @@
       </p:sp>
       <p:sp>
         <p:nvSpPr>
-          <p:cNvPr id="21" name="Text 19"/>
-          <p:cNvSpPr/>
-          <p:nvPr/>
-        </p:nvSpPr>
-        <p:spPr>
-          <a:xfrm>
-            <a:off x="804672" y="4041648"/>
-            <a:ext cx="2194560" cy="256032"/>
-          </a:xfrm>
-          <a:prstGeom prst="rect">
-            <a:avLst/>
-          </a:prstGeom>
-          <a:noFill/>
-          <a:ln/>
-        </p:spPr>
-        <p:txBody>
-          <a:bodyPr wrap="square" rtlCol="0" anchor="ctr"/>
-          <a:lstStyle/>
-          <a:p>
-            <a:pPr indent="0" marL="0">
-              <a:buNone/>
-            </a:pPr>
-            <a:r>
-              <a:rPr lang="en-US" sz="1100" b="1" dirty="0">
+          <p:cNvPr id="29" name="Text 27"/>
+          <p:cNvSpPr/>
+          <p:nvPr/>
+        </p:nvSpPr>
+        <p:spPr>
+          <a:xfrm>
+            <a:off x="4251960" y="3749040"/>
+            <a:ext cx="4069080" cy="274320"/>
+          </a:xfrm>
+          <a:prstGeom prst="rect">
+            <a:avLst/>
+          </a:prstGeom>
+          <a:noFill/>
+          <a:ln/>
+        </p:spPr>
+        <p:txBody>
+          <a:bodyPr wrap="square" rtlCol="0" anchor="ctr"/>
+          <a:lstStyle/>
+          <a:p>
+            <a:pPr indent="0" marL="0">
+              <a:buNone/>
+            </a:pPr>
+            <a:r>
+              <a:rPr lang="en-US" sz="1200" b="1" dirty="0">
                 <a:solidFill>
                   <a:srgbClr val="1C1F27"/>
                 </a:solidFill>
@@ -6036,38 +6298,38 @@
                 <a:ea typeface="Calibri" pitchFamily="34" charset="-122"/>
                 <a:cs typeface="Calibri" pitchFamily="34" charset="-120"/>
               </a:rPr>
-              <a:t>Motion layer</a:t>
-            </a:r>
-            <a:endParaRPr lang="en-US" sz="1100" dirty="0"/>
-          </a:p>
-        </p:txBody>
-      </p:sp>
-      <p:sp>
-        <p:nvSpPr>
-          <p:cNvPr id="22" name="Text 20"/>
-          <p:cNvSpPr/>
-          <p:nvPr/>
-        </p:nvSpPr>
-        <p:spPr>
-          <a:xfrm>
-            <a:off x="804672" y="4297680"/>
-            <a:ext cx="2194560" cy="256032"/>
-          </a:xfrm>
-          <a:prstGeom prst="rect">
-            <a:avLst/>
-          </a:prstGeom>
-          <a:noFill/>
-          <a:ln/>
-        </p:spPr>
-        <p:txBody>
-          <a:bodyPr wrap="square" rtlCol="0" anchor="ctr"/>
-          <a:lstStyle/>
-          <a:p>
-            <a:pPr indent="0" marL="0">
-              <a:buNone/>
-            </a:pPr>
-            <a:r>
-              <a:rPr lang="en-US" sz="950" i="1" dirty="0">
+              <a:t>Scores every lead automatically</a:t>
+            </a:r>
+            <a:endParaRPr lang="en-US" sz="1200" dirty="0"/>
+          </a:p>
+        </p:txBody>
+      </p:sp>
+      <p:sp>
+        <p:nvSpPr>
+          <p:cNvPr id="30" name="Text 28"/>
+          <p:cNvSpPr/>
+          <p:nvPr/>
+        </p:nvSpPr>
+        <p:spPr>
+          <a:xfrm>
+            <a:off x="4251960" y="4023360"/>
+            <a:ext cx="4069080" cy="256032"/>
+          </a:xfrm>
+          <a:prstGeom prst="rect">
+            <a:avLst/>
+          </a:prstGeom>
+          <a:noFill/>
+          <a:ln/>
+        </p:spPr>
+        <p:txBody>
+          <a:bodyPr wrap="square" rtlCol="0" anchor="ctr"/>
+          <a:lstStyle/>
+          <a:p>
+            <a:pPr indent="0" marL="0">
+              <a:buNone/>
+            </a:pPr>
+            <a:r>
+              <a:rPr lang="en-US" sz="1000" i="1" dirty="0">
                 <a:solidFill>
                   <a:srgbClr val="5B6170"/>
                 </a:solidFill>
@@ -6075,22 +6337,22 @@
                 <a:ea typeface="Calibri" pitchFamily="34" charset="-122"/>
                 <a:cs typeface="Calibri" pitchFamily="34" charset="-120"/>
               </a:rPr>
-              <a:t>count-up, funnel wipe, pill flush</a:t>
-            </a:r>
-            <a:endParaRPr lang="en-US" sz="950" dirty="0"/>
-          </a:p>
-        </p:txBody>
-      </p:sp>
-      <p:sp>
-        <p:nvSpPr>
-          <p:cNvPr id="23" name="Shape 21"/>
-          <p:cNvSpPr/>
-          <p:nvPr/>
-        </p:nvSpPr>
-        <p:spPr>
-          <a:xfrm>
-            <a:off x="621792" y="4645152"/>
-            <a:ext cx="100584" cy="100584"/>
+              <a:t>budget, timeline, decision-maker — kept up to date</a:t>
+            </a:r>
+            <a:endParaRPr lang="en-US" sz="1000" dirty="0"/>
+          </a:p>
+        </p:txBody>
+      </p:sp>
+      <p:sp>
+        <p:nvSpPr>
+          <p:cNvPr id="31" name="Shape 29"/>
+          <p:cNvSpPr/>
+          <p:nvPr/>
+        </p:nvSpPr>
+        <p:spPr>
+          <a:xfrm>
+            <a:off x="4005072" y="4462272"/>
+            <a:ext cx="128016" cy="128016"/>
           </a:xfrm>
           <a:prstGeom prst="ellipse">
             <a:avLst/>
@@ -6103,30 +6365,30 @@
       </p:sp>
       <p:sp>
         <p:nvSpPr>
-          <p:cNvPr id="24" name="Text 22"/>
-          <p:cNvSpPr/>
-          <p:nvPr/>
-        </p:nvSpPr>
-        <p:spPr>
-          <a:xfrm>
-            <a:off x="804672" y="4590288"/>
-            <a:ext cx="2194560" cy="256032"/>
-          </a:xfrm>
-          <a:prstGeom prst="rect">
-            <a:avLst/>
-          </a:prstGeom>
-          <a:noFill/>
-          <a:ln/>
-        </p:spPr>
-        <p:txBody>
-          <a:bodyPr wrap="square" rtlCol="0" anchor="ctr"/>
-          <a:lstStyle/>
-          <a:p>
-            <a:pPr indent="0" marL="0">
-              <a:buNone/>
-            </a:pPr>
-            <a:r>
-              <a:rPr lang="en-US" sz="1100" b="1" dirty="0">
+          <p:cNvPr id="32" name="Text 30"/>
+          <p:cNvSpPr/>
+          <p:nvPr/>
+        </p:nvSpPr>
+        <p:spPr>
+          <a:xfrm>
+            <a:off x="4251960" y="4389120"/>
+            <a:ext cx="4069080" cy="274320"/>
+          </a:xfrm>
+          <a:prstGeom prst="rect">
+            <a:avLst/>
+          </a:prstGeom>
+          <a:noFill/>
+          <a:ln/>
+        </p:spPr>
+        <p:txBody>
+          <a:bodyPr wrap="square" rtlCol="0" anchor="ctr"/>
+          <a:lstStyle/>
+          <a:p>
+            <a:pPr indent="0" marL="0">
+              <a:buNone/>
+            </a:pPr>
+            <a:r>
+              <a:rPr lang="en-US" sz="1200" b="1" dirty="0">
                 <a:solidFill>
                   <a:srgbClr val="1C1F27"/>
                 </a:solidFill>
@@ -6134,38 +6396,38 @@
                 <a:ea typeface="Calibri" pitchFamily="34" charset="-122"/>
                 <a:cs typeface="Calibri" pitchFamily="34" charset="-120"/>
               </a:rPr>
-              <a:t>HTTPS / cookies</a:t>
-            </a:r>
-            <a:endParaRPr lang="en-US" sz="1100" dirty="0"/>
-          </a:p>
-        </p:txBody>
-      </p:sp>
-      <p:sp>
-        <p:nvSpPr>
-          <p:cNvPr id="25" name="Text 23"/>
-          <p:cNvSpPr/>
-          <p:nvPr/>
-        </p:nvSpPr>
-        <p:spPr>
-          <a:xfrm>
-            <a:off x="804672" y="4846320"/>
-            <a:ext cx="2194560" cy="256032"/>
-          </a:xfrm>
-          <a:prstGeom prst="rect">
-            <a:avLst/>
-          </a:prstGeom>
-          <a:noFill/>
-          <a:ln/>
-        </p:spPr>
-        <p:txBody>
-          <a:bodyPr wrap="square" rtlCol="0" anchor="ctr"/>
-          <a:lstStyle/>
-          <a:p>
-            <a:pPr indent="0" marL="0">
-              <a:buNone/>
-            </a:pPr>
-            <a:r>
-              <a:rPr lang="en-US" sz="950" i="1" dirty="0">
+              <a:t>Tells the team what needs attention today</a:t>
+            </a:r>
+            <a:endParaRPr lang="en-US" sz="1200" dirty="0"/>
+          </a:p>
+        </p:txBody>
+      </p:sp>
+      <p:sp>
+        <p:nvSpPr>
+          <p:cNvPr id="33" name="Text 31"/>
+          <p:cNvSpPr/>
+          <p:nvPr/>
+        </p:nvSpPr>
+        <p:spPr>
+          <a:xfrm>
+            <a:off x="4251960" y="4663440"/>
+            <a:ext cx="4069080" cy="256032"/>
+          </a:xfrm>
+          <a:prstGeom prst="rect">
+            <a:avLst/>
+          </a:prstGeom>
+          <a:noFill/>
+          <a:ln/>
+        </p:spPr>
+        <p:txBody>
+          <a:bodyPr wrap="square" rtlCol="0" anchor="ctr"/>
+          <a:lstStyle/>
+          <a:p>
+            <a:pPr indent="0" marL="0">
+              <a:buNone/>
+            </a:pPr>
+            <a:r>
+              <a:rPr lang="en-US" sz="1000" i="1" dirty="0">
                 <a:solidFill>
                   <a:srgbClr val="5B6170"/>
                 </a:solidFill>
@@ -6173,26 +6435,26 @@
                 <a:ea typeface="Calibri" pitchFamily="34" charset="-122"/>
                 <a:cs typeface="Calibri" pitchFamily="34" charset="-120"/>
               </a:rPr>
-              <a:t>session token (HttpOnly, SameSite=lax)</a:t>
-            </a:r>
-            <a:endParaRPr lang="en-US" sz="950" dirty="0"/>
-          </a:p>
-        </p:txBody>
-      </p:sp>
-      <p:sp>
-        <p:nvSpPr>
-          <p:cNvPr id="26" name="Shape 24"/>
-          <p:cNvSpPr/>
-          <p:nvPr/>
-        </p:nvSpPr>
-        <p:spPr>
-          <a:xfrm>
-            <a:off x="3429000" y="1828800"/>
-            <a:ext cx="2651760" cy="3566160"/>
+              <a:t>overdue follow-ups, idle leads, hottest deals</a:t>
+            </a:r>
+            <a:endParaRPr lang="en-US" sz="1000" dirty="0"/>
+          </a:p>
+        </p:txBody>
+      </p:sp>
+      <p:sp>
+        <p:nvSpPr>
+          <p:cNvPr id="34" name="Shape 32"/>
+          <p:cNvSpPr/>
+          <p:nvPr/>
+        </p:nvSpPr>
+        <p:spPr>
+          <a:xfrm>
+            <a:off x="8961120" y="1828800"/>
+            <a:ext cx="2773375" cy="1600200"/>
           </a:xfrm>
           <a:prstGeom prst="rect">
             <a:avLst>
-              <a:gd name="adj" fmla="val 2759"/>
+              <a:gd name="adj" fmla="val 4571"/>
             </a:avLst>
           </a:prstGeom>
           <a:solidFill>
@@ -6208,14 +6470,14 @@
       </p:sp>
       <p:sp>
         <p:nvSpPr>
-          <p:cNvPr id="27" name="Shape 25"/>
-          <p:cNvSpPr/>
-          <p:nvPr/>
-        </p:nvSpPr>
-        <p:spPr>
-          <a:xfrm>
-            <a:off x="3429000" y="1828800"/>
-            <a:ext cx="2651760" cy="109728"/>
+          <p:cNvPr id="35" name="Shape 33"/>
+          <p:cNvSpPr/>
+          <p:nvPr/>
+        </p:nvSpPr>
+        <p:spPr>
+          <a:xfrm>
+            <a:off x="8961120" y="1828800"/>
+            <a:ext cx="2773375" cy="109728"/>
           </a:xfrm>
           <a:prstGeom prst="rect">
             <a:avLst>
@@ -6223,21 +6485,21 @@
             </a:avLst>
           </a:prstGeom>
           <a:solidFill>
-            <a:srgbClr val="0E9AA7"/>
+            <a:srgbClr val="17915B"/>
           </a:solidFill>
           <a:ln/>
         </p:spPr>
       </p:sp>
       <p:sp>
         <p:nvSpPr>
-          <p:cNvPr id="28" name="Text 26"/>
-          <p:cNvSpPr/>
-          <p:nvPr/>
-        </p:nvSpPr>
-        <p:spPr>
-          <a:xfrm>
-            <a:off x="3593592" y="1975104"/>
-            <a:ext cx="2322576" cy="329184"/>
+          <p:cNvPr id="36" name="Text 34"/>
+          <p:cNvSpPr/>
+          <p:nvPr/>
+        </p:nvSpPr>
+        <p:spPr>
+          <a:xfrm>
+            <a:off x="9125712" y="1975104"/>
+            <a:ext cx="2444191" cy="329184"/>
           </a:xfrm>
           <a:prstGeom prst="rect">
             <a:avLst/>
@@ -6261,7 +6523,7 @@
                 <a:ea typeface="Calibri" pitchFamily="34" charset="-122"/>
                 <a:cs typeface="Calibri" pitchFamily="34" charset="-120"/>
               </a:rPr>
-              <a:t>NEXT.JS · VERCEL sin1</a:t>
+              <a:t>SAFE RECORDS</a:t>
             </a:r>
             <a:endParaRPr lang="en-US" sz="1200" dirty="0"/>
           </a:p>
@@ -6269,50 +6531,30 @@
       </p:sp>
       <p:sp>
         <p:nvSpPr>
-          <p:cNvPr id="29" name="Shape 27"/>
-          <p:cNvSpPr/>
-          <p:nvPr/>
-        </p:nvSpPr>
-        <p:spPr>
-          <a:xfrm>
-            <a:off x="3593592" y="2441448"/>
-            <a:ext cx="100584" cy="100584"/>
-          </a:xfrm>
-          <a:prstGeom prst="ellipse">
-            <a:avLst/>
-          </a:prstGeom>
-          <a:solidFill>
-            <a:srgbClr val="4A45E0"/>
-          </a:solidFill>
-          <a:ln/>
-        </p:spPr>
-      </p:sp>
-      <p:sp>
-        <p:nvSpPr>
-          <p:cNvPr id="30" name="Text 28"/>
-          <p:cNvSpPr/>
-          <p:nvPr/>
-        </p:nvSpPr>
-        <p:spPr>
-          <a:xfrm>
-            <a:off x="3776472" y="2395728"/>
-            <a:ext cx="2194560" cy="219456"/>
-          </a:xfrm>
-          <a:prstGeom prst="rect">
-            <a:avLst/>
-          </a:prstGeom>
-          <a:noFill/>
-          <a:ln/>
-        </p:spPr>
-        <p:txBody>
-          <a:bodyPr wrap="square" rtlCol="0" anchor="ctr"/>
-          <a:lstStyle/>
-          <a:p>
-            <a:pPr indent="0" marL="0">
-              <a:buNone/>
-            </a:pPr>
-            <a:r>
-              <a:rPr lang="en-US" sz="1050" b="1" dirty="0">
+          <p:cNvPr id="37" name="Text 35"/>
+          <p:cNvSpPr/>
+          <p:nvPr/>
+        </p:nvSpPr>
+        <p:spPr>
+          <a:xfrm>
+            <a:off x="9144000" y="2377440"/>
+            <a:ext cx="2453335" cy="320040"/>
+          </a:xfrm>
+          <a:prstGeom prst="rect">
+            <a:avLst/>
+          </a:prstGeom>
+          <a:noFill/>
+          <a:ln/>
+        </p:spPr>
+        <p:txBody>
+          <a:bodyPr wrap="square" rtlCol="0" anchor="ctr"/>
+          <a:lstStyle/>
+          <a:p>
+            <a:pPr indent="0" marL="0">
+              <a:buNone/>
+            </a:pPr>
+            <a:r>
+              <a:rPr lang="en-US" sz="1100" b="1" dirty="0">
                 <a:solidFill>
                   <a:srgbClr val="1C1F27"/>
                 </a:solidFill>
@@ -6320,38 +6562,38 @@
                 <a:ea typeface="Calibri" pitchFamily="34" charset="-122"/>
                 <a:cs typeface="Calibri" pitchFamily="34" charset="-120"/>
               </a:rPr>
-              <a:t>Middleware</a:t>
-            </a:r>
-            <a:endParaRPr lang="en-US" sz="1050" dirty="0"/>
-          </a:p>
-        </p:txBody>
-      </p:sp>
-      <p:sp>
-        <p:nvSpPr>
-          <p:cNvPr id="31" name="Text 29"/>
-          <p:cNvSpPr/>
-          <p:nvPr/>
-        </p:nvSpPr>
-        <p:spPr>
-          <a:xfrm>
-            <a:off x="3776472" y="2596896"/>
-            <a:ext cx="2194560" cy="201168"/>
-          </a:xfrm>
-          <a:prstGeom prst="rect">
-            <a:avLst/>
-          </a:prstGeom>
-          <a:noFill/>
-          <a:ln/>
-        </p:spPr>
-        <p:txBody>
-          <a:bodyPr wrap="square" rtlCol="0" anchor="ctr"/>
-          <a:lstStyle/>
-          <a:p>
-            <a:pPr indent="0" marL="0">
-              <a:buNone/>
-            </a:pPr>
-            <a:r>
-              <a:rPr lang="en-US" sz="900" i="1" dirty="0">
+              <a:t>Every action is stored — who did what, when</a:t>
+            </a:r>
+            <a:endParaRPr lang="en-US" sz="1100" dirty="0"/>
+          </a:p>
+        </p:txBody>
+      </p:sp>
+      <p:sp>
+        <p:nvSpPr>
+          <p:cNvPr id="38" name="Text 36"/>
+          <p:cNvSpPr/>
+          <p:nvPr/>
+        </p:nvSpPr>
+        <p:spPr>
+          <a:xfrm>
+            <a:off x="9144000" y="2697480"/>
+            <a:ext cx="2453335" cy="685800"/>
+          </a:xfrm>
+          <a:prstGeom prst="rect">
+            <a:avLst/>
+          </a:prstGeom>
+          <a:noFill/>
+          <a:ln/>
+        </p:spPr>
+        <p:txBody>
+          <a:bodyPr wrap="square" rtlCol="0" anchor="t"/>
+          <a:lstStyle/>
+          <a:p>
+            <a:pPr indent="0" marL="0">
+              <a:buNone/>
+            </a:pPr>
+            <a:r>
+              <a:rPr lang="en-US" sz="1000" dirty="0">
                 <a:solidFill>
                   <a:srgbClr val="5B6170"/>
                 </a:solidFill>
@@ -6359,614 +6601,26 @@
                 <a:ea typeface="Calibri" pitchFamily="34" charset="-122"/>
                 <a:cs typeface="Calibri" pitchFamily="34" charset="-120"/>
               </a:rPr>
-              <a:t>auth gate — verifies session cookie</a:t>
-            </a:r>
-            <a:endParaRPr lang="en-US" sz="900" dirty="0"/>
-          </a:p>
-        </p:txBody>
-      </p:sp>
-      <p:sp>
-        <p:nvSpPr>
-          <p:cNvPr id="32" name="Shape 30"/>
-          <p:cNvSpPr/>
-          <p:nvPr/>
-        </p:nvSpPr>
-        <p:spPr>
-          <a:xfrm>
-            <a:off x="3593592" y="2843784"/>
-            <a:ext cx="100584" cy="100584"/>
-          </a:xfrm>
-          <a:prstGeom prst="ellipse">
-            <a:avLst/>
-          </a:prstGeom>
-          <a:solidFill>
-            <a:srgbClr val="4A45E0"/>
-          </a:solidFill>
-          <a:ln/>
-        </p:spPr>
-      </p:sp>
-      <p:sp>
-        <p:nvSpPr>
-          <p:cNvPr id="33" name="Text 31"/>
-          <p:cNvSpPr/>
-          <p:nvPr/>
-        </p:nvSpPr>
-        <p:spPr>
-          <a:xfrm>
-            <a:off x="3776472" y="2798064"/>
-            <a:ext cx="2194560" cy="219456"/>
-          </a:xfrm>
-          <a:prstGeom prst="rect">
-            <a:avLst/>
-          </a:prstGeom>
-          <a:noFill/>
-          <a:ln/>
-        </p:spPr>
-        <p:txBody>
-          <a:bodyPr wrap="square" rtlCol="0" anchor="ctr"/>
-          <a:lstStyle/>
-          <a:p>
-            <a:pPr indent="0" marL="0">
-              <a:buNone/>
-            </a:pPr>
-            <a:r>
-              <a:rPr lang="en-US" sz="1050" b="1" dirty="0">
-                <a:solidFill>
-                  <a:srgbClr val="1C1F27"/>
-                </a:solidFill>
-                <a:latin typeface="Calibri" pitchFamily="34" charset="0"/>
-                <a:ea typeface="Calibri" pitchFamily="34" charset="-122"/>
-                <a:cs typeface="Calibri" pitchFamily="34" charset="-120"/>
-              </a:rPr>
-              <a:t>Server actions</a:t>
-            </a:r>
-            <a:endParaRPr lang="en-US" sz="1050" dirty="0"/>
-          </a:p>
-        </p:txBody>
-      </p:sp>
-      <p:sp>
-        <p:nvSpPr>
-          <p:cNvPr id="34" name="Text 32"/>
-          <p:cNvSpPr/>
-          <p:nvPr/>
-        </p:nvSpPr>
-        <p:spPr>
-          <a:xfrm>
-            <a:off x="3776472" y="2999232"/>
-            <a:ext cx="2194560" cy="201168"/>
-          </a:xfrm>
-          <a:prstGeom prst="rect">
-            <a:avLst/>
-          </a:prstGeom>
-          <a:noFill/>
-          <a:ln/>
-        </p:spPr>
-        <p:txBody>
-          <a:bodyPr wrap="square" rtlCol="0" anchor="ctr"/>
-          <a:lstStyle/>
-          <a:p>
-            <a:pPr indent="0" marL="0">
-              <a:buNone/>
-            </a:pPr>
-            <a:r>
-              <a:rPr lang="en-US" sz="900" i="1" dirty="0">
-                <a:solidFill>
-                  <a:srgbClr val="5B6170"/>
-                </a:solidFill>
-                <a:latin typeface="Calibri" pitchFamily="34" charset="0"/>
-                <a:ea typeface="Calibri" pitchFamily="34" charset="-122"/>
-                <a:cs typeface="Calibri" pitchFamily="34" charset="-120"/>
-              </a:rPr>
-              <a:t>recheck can() + transition rule</a:t>
-            </a:r>
-            <a:endParaRPr lang="en-US" sz="900" dirty="0"/>
-          </a:p>
-        </p:txBody>
-      </p:sp>
-      <p:sp>
-        <p:nvSpPr>
-          <p:cNvPr id="35" name="Shape 33"/>
-          <p:cNvSpPr/>
-          <p:nvPr/>
-        </p:nvSpPr>
-        <p:spPr>
-          <a:xfrm>
-            <a:off x="3593592" y="3246120"/>
-            <a:ext cx="100584" cy="100584"/>
-          </a:xfrm>
-          <a:prstGeom prst="ellipse">
-            <a:avLst/>
-          </a:prstGeom>
-          <a:solidFill>
-            <a:srgbClr val="4A45E0"/>
-          </a:solidFill>
-          <a:ln/>
-        </p:spPr>
-      </p:sp>
-      <p:sp>
-        <p:nvSpPr>
-          <p:cNvPr id="36" name="Text 34"/>
-          <p:cNvSpPr/>
-          <p:nvPr/>
-        </p:nvSpPr>
-        <p:spPr>
-          <a:xfrm>
-            <a:off x="3776472" y="3200400"/>
-            <a:ext cx="2194560" cy="219456"/>
-          </a:xfrm>
-          <a:prstGeom prst="rect">
-            <a:avLst/>
-          </a:prstGeom>
-          <a:noFill/>
-          <a:ln/>
-        </p:spPr>
-        <p:txBody>
-          <a:bodyPr wrap="square" rtlCol="0" anchor="ctr"/>
-          <a:lstStyle/>
-          <a:p>
-            <a:pPr indent="0" marL="0">
-              <a:buNone/>
-            </a:pPr>
-            <a:r>
-              <a:rPr lang="en-US" sz="1050" b="1" dirty="0">
-                <a:solidFill>
-                  <a:srgbClr val="1C1F27"/>
-                </a:solidFill>
-                <a:latin typeface="Calibri" pitchFamily="34" charset="0"/>
-                <a:ea typeface="Calibri" pitchFamily="34" charset="-122"/>
-                <a:cs typeface="Calibri" pitchFamily="34" charset="-120"/>
-              </a:rPr>
-              <a:t>lib/permissions.ts</a:t>
-            </a:r>
-            <a:endParaRPr lang="en-US" sz="1050" dirty="0"/>
-          </a:p>
-        </p:txBody>
-      </p:sp>
-      <p:sp>
-        <p:nvSpPr>
-          <p:cNvPr id="37" name="Text 35"/>
-          <p:cNvSpPr/>
-          <p:nvPr/>
-        </p:nvSpPr>
-        <p:spPr>
-          <a:xfrm>
-            <a:off x="3776472" y="3401568"/>
-            <a:ext cx="2194560" cy="201168"/>
-          </a:xfrm>
-          <a:prstGeom prst="rect">
-            <a:avLst/>
-          </a:prstGeom>
-          <a:noFill/>
-          <a:ln/>
-        </p:spPr>
-        <p:txBody>
-          <a:bodyPr wrap="square" rtlCol="0" anchor="ctr"/>
-          <a:lstStyle/>
-          <a:p>
-            <a:pPr indent="0" marL="0">
-              <a:buNone/>
-            </a:pPr>
-            <a:r>
-              <a:rPr lang="en-US" sz="900" i="1" dirty="0">
-                <a:solidFill>
-                  <a:srgbClr val="5B6170"/>
-                </a:solidFill>
-                <a:latin typeface="Calibri" pitchFamily="34" charset="0"/>
-                <a:ea typeface="Calibri" pitchFamily="34" charset="-122"/>
-                <a:cs typeface="Calibri" pitchFamily="34" charset="-120"/>
-              </a:rPr>
-              <a:t>pure, unit-tested (14 tests)</a:t>
-            </a:r>
-            <a:endParaRPr lang="en-US" sz="900" dirty="0"/>
-          </a:p>
-        </p:txBody>
-      </p:sp>
-      <p:sp>
-        <p:nvSpPr>
-          <p:cNvPr id="38" name="Shape 36"/>
-          <p:cNvSpPr/>
-          <p:nvPr/>
-        </p:nvSpPr>
-        <p:spPr>
-          <a:xfrm>
-            <a:off x="3593592" y="3648456"/>
-            <a:ext cx="100584" cy="100584"/>
-          </a:xfrm>
-          <a:prstGeom prst="ellipse">
-            <a:avLst/>
-          </a:prstGeom>
-          <a:solidFill>
-            <a:srgbClr val="4A45E0"/>
-          </a:solidFill>
-          <a:ln/>
-        </p:spPr>
-      </p:sp>
-      <p:sp>
-        <p:nvSpPr>
-          <p:cNvPr id="39" name="Text 37"/>
-          <p:cNvSpPr/>
-          <p:nvPr/>
-        </p:nvSpPr>
-        <p:spPr>
-          <a:xfrm>
-            <a:off x="3776472" y="3602736"/>
-            <a:ext cx="2194560" cy="219456"/>
-          </a:xfrm>
-          <a:prstGeom prst="rect">
-            <a:avLst/>
-          </a:prstGeom>
-          <a:noFill/>
-          <a:ln/>
-        </p:spPr>
-        <p:txBody>
-          <a:bodyPr wrap="square" rtlCol="0" anchor="ctr"/>
-          <a:lstStyle/>
-          <a:p>
-            <a:pPr indent="0" marL="0">
-              <a:buNone/>
-            </a:pPr>
-            <a:r>
-              <a:rPr lang="en-US" sz="1050" b="1" dirty="0">
-                <a:solidFill>
-                  <a:srgbClr val="1C1F27"/>
-                </a:solidFill>
-                <a:latin typeface="Calibri" pitchFamily="34" charset="0"/>
-                <a:ea typeface="Calibri" pitchFamily="34" charset="-122"/>
-                <a:cs typeface="Calibri" pitchFamily="34" charset="-120"/>
-              </a:rPr>
-              <a:t>lib/transitions.ts</a:t>
-            </a:r>
-            <a:endParaRPr lang="en-US" sz="1050" dirty="0"/>
-          </a:p>
-        </p:txBody>
-      </p:sp>
-      <p:sp>
-        <p:nvSpPr>
-          <p:cNvPr id="40" name="Text 38"/>
-          <p:cNvSpPr/>
-          <p:nvPr/>
-        </p:nvSpPr>
-        <p:spPr>
-          <a:xfrm>
-            <a:off x="3776472" y="3803904"/>
-            <a:ext cx="2194560" cy="201168"/>
-          </a:xfrm>
-          <a:prstGeom prst="rect">
-            <a:avLst/>
-          </a:prstGeom>
-          <a:noFill/>
-          <a:ln/>
-        </p:spPr>
-        <p:txBody>
-          <a:bodyPr wrap="square" rtlCol="0" anchor="ctr"/>
-          <a:lstStyle/>
-          <a:p>
-            <a:pPr indent="0" marL="0">
-              <a:buNone/>
-            </a:pPr>
-            <a:r>
-              <a:rPr lang="en-US" sz="900" i="1" dirty="0">
-                <a:solidFill>
-                  <a:srgbClr val="5B6170"/>
-                </a:solidFill>
-                <a:latin typeface="Calibri" pitchFamily="34" charset="0"/>
-                <a:ea typeface="Calibri" pitchFamily="34" charset="-122"/>
-                <a:cs typeface="Calibri" pitchFamily="34" charset="-120"/>
-              </a:rPr>
-              <a:t>one-step-forward funnel rule</a:t>
-            </a:r>
-            <a:endParaRPr lang="en-US" sz="900" dirty="0"/>
-          </a:p>
-        </p:txBody>
-      </p:sp>
-      <p:sp>
-        <p:nvSpPr>
-          <p:cNvPr id="41" name="Shape 39"/>
-          <p:cNvSpPr/>
-          <p:nvPr/>
-        </p:nvSpPr>
-        <p:spPr>
-          <a:xfrm>
-            <a:off x="3593592" y="4050792"/>
-            <a:ext cx="100584" cy="100584"/>
-          </a:xfrm>
-          <a:prstGeom prst="ellipse">
-            <a:avLst/>
-          </a:prstGeom>
-          <a:solidFill>
-            <a:srgbClr val="4A45E0"/>
-          </a:solidFill>
-          <a:ln/>
-        </p:spPr>
-      </p:sp>
-      <p:sp>
-        <p:nvSpPr>
-          <p:cNvPr id="42" name="Text 40"/>
-          <p:cNvSpPr/>
-          <p:nvPr/>
-        </p:nvSpPr>
-        <p:spPr>
-          <a:xfrm>
-            <a:off x="3776472" y="4005072"/>
-            <a:ext cx="2194560" cy="219456"/>
-          </a:xfrm>
-          <a:prstGeom prst="rect">
-            <a:avLst/>
-          </a:prstGeom>
-          <a:noFill/>
-          <a:ln/>
-        </p:spPr>
-        <p:txBody>
-          <a:bodyPr wrap="square" rtlCol="0" anchor="ctr"/>
-          <a:lstStyle/>
-          <a:p>
-            <a:pPr indent="0" marL="0">
-              <a:buNone/>
-            </a:pPr>
-            <a:r>
-              <a:rPr lang="en-US" sz="1050" b="1" dirty="0">
-                <a:solidFill>
-                  <a:srgbClr val="1C1F27"/>
-                </a:solidFill>
-                <a:latin typeface="Calibri" pitchFamily="34" charset="0"/>
-                <a:ea typeface="Calibri" pitchFamily="34" charset="-122"/>
-                <a:cs typeface="Calibri" pitchFamily="34" charset="-120"/>
-              </a:rPr>
-              <a:t>lib/scoring.ts</a:t>
-            </a:r>
-            <a:endParaRPr lang="en-US" sz="1050" dirty="0"/>
-          </a:p>
-        </p:txBody>
-      </p:sp>
-      <p:sp>
-        <p:nvSpPr>
-          <p:cNvPr id="43" name="Text 41"/>
-          <p:cNvSpPr/>
-          <p:nvPr/>
-        </p:nvSpPr>
-        <p:spPr>
-          <a:xfrm>
-            <a:off x="3776472" y="4206240"/>
-            <a:ext cx="2194560" cy="201168"/>
-          </a:xfrm>
-          <a:prstGeom prst="rect">
-            <a:avLst/>
-          </a:prstGeom>
-          <a:noFill/>
-          <a:ln/>
-        </p:spPr>
-        <p:txBody>
-          <a:bodyPr wrap="square" rtlCol="0" anchor="ctr"/>
-          <a:lstStyle/>
-          <a:p>
-            <a:pPr indent="0" marL="0">
-              <a:buNone/>
-            </a:pPr>
-            <a:r>
-              <a:rPr lang="en-US" sz="900" i="1" dirty="0">
-                <a:solidFill>
-                  <a:srgbClr val="5B6170"/>
-                </a:solidFill>
-                <a:latin typeface="Calibri" pitchFamily="34" charset="0"/>
-                <a:ea typeface="Calibri" pitchFamily="34" charset="-122"/>
-                <a:cs typeface="Calibri" pitchFamily="34" charset="-120"/>
-              </a:rPr>
-              <a:t>fit score, temperature (ADR-0003)</a:t>
-            </a:r>
-            <a:endParaRPr lang="en-US" sz="900" dirty="0"/>
-          </a:p>
-        </p:txBody>
-      </p:sp>
-      <p:sp>
-        <p:nvSpPr>
-          <p:cNvPr id="44" name="Shape 42"/>
-          <p:cNvSpPr/>
-          <p:nvPr/>
-        </p:nvSpPr>
-        <p:spPr>
-          <a:xfrm>
-            <a:off x="3593592" y="4453128"/>
-            <a:ext cx="100584" cy="100584"/>
-          </a:xfrm>
-          <a:prstGeom prst="ellipse">
-            <a:avLst/>
-          </a:prstGeom>
-          <a:solidFill>
-            <a:srgbClr val="4A45E0"/>
-          </a:solidFill>
-          <a:ln/>
-        </p:spPr>
-      </p:sp>
-      <p:sp>
-        <p:nvSpPr>
-          <p:cNvPr id="45" name="Text 43"/>
-          <p:cNvSpPr/>
-          <p:nvPr/>
-        </p:nvSpPr>
-        <p:spPr>
-          <a:xfrm>
-            <a:off x="3776472" y="4407408"/>
-            <a:ext cx="2194560" cy="219456"/>
-          </a:xfrm>
-          <a:prstGeom prst="rect">
-            <a:avLst/>
-          </a:prstGeom>
-          <a:noFill/>
-          <a:ln/>
-        </p:spPr>
-        <p:txBody>
-          <a:bodyPr wrap="square" rtlCol="0" anchor="ctr"/>
-          <a:lstStyle/>
-          <a:p>
-            <a:pPr indent="0" marL="0">
-              <a:buNone/>
-            </a:pPr>
-            <a:r>
-              <a:rPr lang="en-US" sz="1050" b="1" dirty="0">
-                <a:solidFill>
-                  <a:srgbClr val="1C1F27"/>
-                </a:solidFill>
-                <a:latin typeface="Calibri" pitchFamily="34" charset="0"/>
-                <a:ea typeface="Calibri" pitchFamily="34" charset="-122"/>
-                <a:cs typeface="Calibri" pitchFamily="34" charset="-120"/>
-              </a:rPr>
-              <a:t>lib/velocity.ts</a:t>
-            </a:r>
-            <a:endParaRPr lang="en-US" sz="1050" dirty="0"/>
-          </a:p>
-        </p:txBody>
-      </p:sp>
-      <p:sp>
-        <p:nvSpPr>
-          <p:cNvPr id="46" name="Text 44"/>
-          <p:cNvSpPr/>
-          <p:nvPr/>
-        </p:nvSpPr>
-        <p:spPr>
-          <a:xfrm>
-            <a:off x="3776472" y="4608576"/>
-            <a:ext cx="2194560" cy="201168"/>
-          </a:xfrm>
-          <a:prstGeom prst="rect">
-            <a:avLst/>
-          </a:prstGeom>
-          <a:noFill/>
-          <a:ln/>
-        </p:spPr>
-        <p:txBody>
-          <a:bodyPr wrap="square" rtlCol="0" anchor="ctr"/>
-          <a:lstStyle/>
-          <a:p>
-            <a:pPr indent="0" marL="0">
-              <a:buNone/>
-            </a:pPr>
-            <a:r>
-              <a:rPr lang="en-US" sz="900" i="1" dirty="0">
-                <a:solidFill>
-                  <a:srgbClr val="5B6170"/>
-                </a:solidFill>
-                <a:latin typeface="Calibri" pitchFamily="34" charset="0"/>
-                <a:ea typeface="Calibri" pitchFamily="34" charset="-122"/>
-                <a:cs typeface="Calibri" pitchFamily="34" charset="-120"/>
-              </a:rPr>
-              <a:t>time-in-stage, conversion, cycle</a:t>
-            </a:r>
-            <a:endParaRPr lang="en-US" sz="900" dirty="0"/>
-          </a:p>
-        </p:txBody>
-      </p:sp>
-      <p:sp>
-        <p:nvSpPr>
-          <p:cNvPr id="47" name="Shape 45"/>
-          <p:cNvSpPr/>
-          <p:nvPr/>
-        </p:nvSpPr>
-        <p:spPr>
-          <a:xfrm>
-            <a:off x="3593592" y="4855464"/>
-            <a:ext cx="100584" cy="100584"/>
-          </a:xfrm>
-          <a:prstGeom prst="ellipse">
-            <a:avLst/>
-          </a:prstGeom>
-          <a:solidFill>
-            <a:srgbClr val="4A45E0"/>
-          </a:solidFill>
-          <a:ln/>
-        </p:spPr>
-      </p:sp>
-      <p:sp>
-        <p:nvSpPr>
-          <p:cNvPr id="48" name="Text 46"/>
-          <p:cNvSpPr/>
-          <p:nvPr/>
-        </p:nvSpPr>
-        <p:spPr>
-          <a:xfrm>
-            <a:off x="3776472" y="4809744"/>
-            <a:ext cx="2194560" cy="219456"/>
-          </a:xfrm>
-          <a:prstGeom prst="rect">
-            <a:avLst/>
-          </a:prstGeom>
-          <a:noFill/>
-          <a:ln/>
-        </p:spPr>
-        <p:txBody>
-          <a:bodyPr wrap="square" rtlCol="0" anchor="ctr"/>
-          <a:lstStyle/>
-          <a:p>
-            <a:pPr indent="0" marL="0">
-              <a:buNone/>
-            </a:pPr>
-            <a:r>
-              <a:rPr lang="en-US" sz="1050" b="1" dirty="0">
-                <a:solidFill>
-                  <a:srgbClr val="1C1F27"/>
-                </a:solidFill>
-                <a:latin typeface="Calibri" pitchFamily="34" charset="0"/>
-                <a:ea typeface="Calibri" pitchFamily="34" charset="-122"/>
-                <a:cs typeface="Calibri" pitchFamily="34" charset="-120"/>
-              </a:rPr>
-              <a:t>lib/whatsapp.ts</a:t>
-            </a:r>
-            <a:endParaRPr lang="en-US" sz="1050" dirty="0"/>
-          </a:p>
-        </p:txBody>
-      </p:sp>
-      <p:sp>
-        <p:nvSpPr>
-          <p:cNvPr id="49" name="Text 47"/>
-          <p:cNvSpPr/>
-          <p:nvPr/>
-        </p:nvSpPr>
-        <p:spPr>
-          <a:xfrm>
-            <a:off x="3776472" y="5010912"/>
-            <a:ext cx="2194560" cy="201168"/>
-          </a:xfrm>
-          <a:prstGeom prst="rect">
-            <a:avLst/>
-          </a:prstGeom>
-          <a:noFill/>
-          <a:ln/>
-        </p:spPr>
-        <p:txBody>
-          <a:bodyPr wrap="square" rtlCol="0" anchor="ctr"/>
-          <a:lstStyle/>
-          <a:p>
-            <a:pPr indent="0" marL="0">
-              <a:buNone/>
-            </a:pPr>
-            <a:r>
-              <a:rPr lang="en-US" sz="900" i="1" dirty="0">
-                <a:solidFill>
-                  <a:srgbClr val="5B6170"/>
-                </a:solidFill>
-                <a:latin typeface="Calibri" pitchFamily="34" charset="0"/>
-                <a:ea typeface="Calibri" pitchFamily="34" charset="-122"/>
-                <a:cs typeface="Calibri" pitchFamily="34" charset="-120"/>
-              </a:rPr>
-              <a:t>phone normalise, wa.me link, roles</a:t>
-            </a:r>
-            <a:endParaRPr lang="en-US" sz="900" dirty="0"/>
-          </a:p>
-        </p:txBody>
-      </p:sp>
-      <p:sp>
-        <p:nvSpPr>
-          <p:cNvPr id="50" name="Shape 48"/>
-          <p:cNvSpPr/>
-          <p:nvPr/>
-        </p:nvSpPr>
-        <p:spPr>
-          <a:xfrm>
-            <a:off x="6400800" y="1828800"/>
-            <a:ext cx="2651760" cy="3566160"/>
+              <a:t>The full history of each lead lives in one place — nothing is deleted, so audits and reports always add up.</a:t>
+            </a:r>
+            <a:endParaRPr lang="en-US" sz="1000" dirty="0"/>
+          </a:p>
+        </p:txBody>
+      </p:sp>
+      <p:sp>
+        <p:nvSpPr>
+          <p:cNvPr id="39" name="Shape 37"/>
+          <p:cNvSpPr/>
+          <p:nvPr/>
+        </p:nvSpPr>
+        <p:spPr>
+          <a:xfrm>
+            <a:off x="8961120" y="3611880"/>
+            <a:ext cx="2773375" cy="1600200"/>
           </a:xfrm>
           <a:prstGeom prst="rect">
             <a:avLst>
-              <a:gd name="adj" fmla="val 2759"/>
+              <a:gd name="adj" fmla="val 4571"/>
             </a:avLst>
           </a:prstGeom>
           <a:solidFill>
@@ -6982,14 +6636,14 @@
       </p:sp>
       <p:sp>
         <p:nvSpPr>
-          <p:cNvPr id="51" name="Shape 49"/>
-          <p:cNvSpPr/>
-          <p:nvPr/>
-        </p:nvSpPr>
-        <p:spPr>
-          <a:xfrm>
-            <a:off x="6400800" y="1828800"/>
-            <a:ext cx="2651760" cy="109728"/>
+          <p:cNvPr id="40" name="Shape 38"/>
+          <p:cNvSpPr/>
+          <p:nvPr/>
+        </p:nvSpPr>
+        <p:spPr>
+          <a:xfrm>
+            <a:off x="8961120" y="3611880"/>
+            <a:ext cx="2773375" cy="109728"/>
           </a:xfrm>
           <a:prstGeom prst="rect">
             <a:avLst>
@@ -6997,21 +6651,21 @@
             </a:avLst>
           </a:prstGeom>
           <a:solidFill>
-            <a:srgbClr val="D98A0B"/>
+            <a:srgbClr val="0E9AA7"/>
           </a:solidFill>
           <a:ln/>
         </p:spPr>
       </p:sp>
       <p:sp>
         <p:nvSpPr>
-          <p:cNvPr id="52" name="Text 50"/>
-          <p:cNvSpPr/>
-          <p:nvPr/>
-        </p:nvSpPr>
-        <p:spPr>
-          <a:xfrm>
-            <a:off x="6565392" y="1975104"/>
-            <a:ext cx="2322576" cy="329184"/>
+          <p:cNvPr id="41" name="Text 39"/>
+          <p:cNvSpPr/>
+          <p:nvPr/>
+        </p:nvSpPr>
+        <p:spPr>
+          <a:xfrm>
+            <a:off x="9125712" y="3758184"/>
+            <a:ext cx="2444191" cy="329184"/>
           </a:xfrm>
           <a:prstGeom prst="rect">
             <a:avLst/>
@@ -7035,7 +6689,7 @@
                 <a:ea typeface="Calibri" pitchFamily="34" charset="-122"/>
                 <a:cs typeface="Calibri" pitchFamily="34" charset="-120"/>
               </a:rPr>
-              <a:t>PRISMA + POSTGRES (NEON sin1)</a:t>
+              <a:t>WHATSAPP, IN ONE TAP</a:t>
             </a:r>
             <a:endParaRPr lang="en-US" sz="1200" dirty="0"/>
           </a:p>
@@ -7043,34 +6697,14 @@
       </p:sp>
       <p:sp>
         <p:nvSpPr>
-          <p:cNvPr id="53" name="Shape 51"/>
-          <p:cNvSpPr/>
-          <p:nvPr/>
-        </p:nvSpPr>
-        <p:spPr>
-          <a:xfrm>
-            <a:off x="6565392" y="2441448"/>
-            <a:ext cx="100584" cy="100584"/>
-          </a:xfrm>
-          <a:prstGeom prst="ellipse">
-            <a:avLst/>
-          </a:prstGeom>
-          <a:solidFill>
-            <a:srgbClr val="4A45E0"/>
-          </a:solidFill>
-          <a:ln/>
-        </p:spPr>
-      </p:sp>
-      <p:sp>
-        <p:nvSpPr>
-          <p:cNvPr id="54" name="Text 52"/>
-          <p:cNvSpPr/>
-          <p:nvPr/>
-        </p:nvSpPr>
-        <p:spPr>
-          <a:xfrm>
-            <a:off x="6748272" y="2395728"/>
-            <a:ext cx="2194560" cy="237744"/>
+          <p:cNvPr id="42" name="Text 40"/>
+          <p:cNvSpPr/>
+          <p:nvPr/>
+        </p:nvSpPr>
+        <p:spPr>
+          <a:xfrm>
+            <a:off x="9144000" y="4160520"/>
+            <a:ext cx="2453335" cy="320040"/>
           </a:xfrm>
           <a:prstGeom prst="rect">
             <a:avLst/>
@@ -7094,7 +6728,7 @@
                 <a:ea typeface="Calibri" pitchFamily="34" charset="-122"/>
                 <a:cs typeface="Calibri" pitchFamily="34" charset="-120"/>
               </a:rPr>
-              <a:t>User · Lead · Activity</a:t>
+              <a:t>Opens WhatsApp with the message ready to send</a:t>
             </a:r>
             <a:endParaRPr lang="en-US" sz="1100" dirty="0"/>
           </a:p>
@@ -7102,30 +6736,30 @@
       </p:sp>
       <p:sp>
         <p:nvSpPr>
-          <p:cNvPr id="55" name="Text 53"/>
-          <p:cNvSpPr/>
-          <p:nvPr/>
-        </p:nvSpPr>
-        <p:spPr>
-          <a:xfrm>
-            <a:off x="6748272" y="2615184"/>
-            <a:ext cx="2194560" cy="219456"/>
-          </a:xfrm>
-          <a:prstGeom prst="rect">
-            <a:avLst/>
-          </a:prstGeom>
-          <a:noFill/>
-          <a:ln/>
-        </p:spPr>
-        <p:txBody>
-          <a:bodyPr wrap="square" rtlCol="0" anchor="ctr"/>
-          <a:lstStyle/>
-          <a:p>
-            <a:pPr indent="0" marL="0">
-              <a:buNone/>
-            </a:pPr>
-            <a:r>
-              <a:rPr lang="en-US" sz="950" i="1" dirty="0">
+          <p:cNvPr id="43" name="Text 41"/>
+          <p:cNvSpPr/>
+          <p:nvPr/>
+        </p:nvSpPr>
+        <p:spPr>
+          <a:xfrm>
+            <a:off x="9144000" y="4480560"/>
+            <a:ext cx="2453335" cy="685800"/>
+          </a:xfrm>
+          <a:prstGeom prst="rect">
+            <a:avLst/>
+          </a:prstGeom>
+          <a:noFill/>
+          <a:ln/>
+        </p:spPr>
+        <p:txBody>
+          <a:bodyPr wrap="square" rtlCol="0" anchor="t"/>
+          <a:lstStyle/>
+          <a:p>
+            <a:pPr indent="0" marL="0">
+              <a:buNone/>
+            </a:pPr>
+            <a:r>
+              <a:rPr lang="en-US" sz="1000" dirty="0">
                 <a:solidFill>
                   <a:srgbClr val="5B6170"/>
                 </a:solidFill>
@@ -7133,516 +6767,98 @@
                 <a:ea typeface="Calibri" pitchFamily="34" charset="-122"/>
                 <a:cs typeface="Calibri" pitchFamily="34" charset="-120"/>
               </a:rPr>
-              <a:t>core entities (Blueprint §6)</a:t>
-            </a:r>
-            <a:endParaRPr lang="en-US" sz="950" dirty="0"/>
-          </a:p>
-        </p:txBody>
-      </p:sp>
-      <p:sp>
-        <p:nvSpPr>
-          <p:cNvPr id="56" name="Shape 54"/>
-          <p:cNvSpPr/>
-          <p:nvPr/>
-        </p:nvSpPr>
-        <p:spPr>
-          <a:xfrm>
-            <a:off x="6565392" y="2898648"/>
-            <a:ext cx="100584" cy="100584"/>
-          </a:xfrm>
-          <a:prstGeom prst="ellipse">
-            <a:avLst/>
-          </a:prstGeom>
-          <a:solidFill>
-            <a:srgbClr val="4A45E0"/>
-          </a:solidFill>
-          <a:ln/>
-        </p:spPr>
-      </p:sp>
-      <p:sp>
-        <p:nvSpPr>
-          <p:cNvPr id="57" name="Text 55"/>
-          <p:cNvSpPr/>
-          <p:nvPr/>
-        </p:nvSpPr>
-        <p:spPr>
-          <a:xfrm>
-            <a:off x="6748272" y="2852928"/>
-            <a:ext cx="2194560" cy="237744"/>
-          </a:xfrm>
-          <a:prstGeom prst="rect">
-            <a:avLst/>
-          </a:prstGeom>
-          <a:noFill/>
-          <a:ln/>
-        </p:spPr>
-        <p:txBody>
-          <a:bodyPr wrap="square" rtlCol="0" anchor="ctr"/>
-          <a:lstStyle/>
-          <a:p>
-            <a:pPr indent="0" marL="0">
-              <a:buNone/>
-            </a:pPr>
-            <a:r>
-              <a:rPr lang="en-US" sz="1100" b="1" dirty="0">
-                <a:solidFill>
-                  <a:srgbClr val="1C1F27"/>
-                </a:solidFill>
-                <a:latin typeface="Calibri" pitchFamily="34" charset="0"/>
-                <a:ea typeface="Calibri" pitchFamily="34" charset="-122"/>
-                <a:cs typeface="Calibri" pitchFamily="34" charset="-120"/>
-              </a:rPr>
-              <a:t>CustomSource</a:t>
-            </a:r>
-            <a:endParaRPr lang="en-US" sz="1100" dirty="0"/>
-          </a:p>
-        </p:txBody>
-      </p:sp>
-      <p:sp>
-        <p:nvSpPr>
-          <p:cNvPr id="58" name="Text 56"/>
-          <p:cNvSpPr/>
-          <p:nvPr/>
-        </p:nvSpPr>
-        <p:spPr>
-          <a:xfrm>
-            <a:off x="6748272" y="3072384"/>
-            <a:ext cx="2194560" cy="219456"/>
-          </a:xfrm>
-          <a:prstGeom prst="rect">
-            <a:avLst/>
-          </a:prstGeom>
-          <a:noFill/>
-          <a:ln/>
-        </p:spPr>
-        <p:txBody>
-          <a:bodyPr wrap="square" rtlCol="0" anchor="ctr"/>
-          <a:lstStyle/>
-          <a:p>
-            <a:pPr indent="0" marL="0">
-              <a:buNone/>
-            </a:pPr>
-            <a:r>
-              <a:rPr lang="en-US" sz="950" i="1" dirty="0">
-                <a:solidFill>
-                  <a:srgbClr val="5B6170"/>
-                </a:solidFill>
-                <a:latin typeface="Calibri" pitchFamily="34" charset="0"/>
-                <a:ea typeface="Calibri" pitchFamily="34" charset="-122"/>
-                <a:cs typeface="Calibri" pitchFamily="34" charset="-120"/>
-              </a:rPr>
-              <a:t>team-added sources (§14.7)</a:t>
-            </a:r>
-            <a:endParaRPr lang="en-US" sz="950" dirty="0"/>
-          </a:p>
-        </p:txBody>
-      </p:sp>
-      <p:sp>
-        <p:nvSpPr>
-          <p:cNvPr id="59" name="Shape 57"/>
-          <p:cNvSpPr/>
-          <p:nvPr/>
-        </p:nvSpPr>
-        <p:spPr>
-          <a:xfrm>
-            <a:off x="6565392" y="3355848"/>
-            <a:ext cx="100584" cy="100584"/>
-          </a:xfrm>
-          <a:prstGeom prst="ellipse">
-            <a:avLst/>
-          </a:prstGeom>
-          <a:solidFill>
-            <a:srgbClr val="4A45E0"/>
-          </a:solidFill>
-          <a:ln/>
-        </p:spPr>
-      </p:sp>
-      <p:sp>
-        <p:nvSpPr>
-          <p:cNvPr id="60" name="Text 58"/>
-          <p:cNvSpPr/>
-          <p:nvPr/>
-        </p:nvSpPr>
-        <p:spPr>
-          <a:xfrm>
-            <a:off x="6748272" y="3310128"/>
-            <a:ext cx="2194560" cy="237744"/>
-          </a:xfrm>
-          <a:prstGeom prst="rect">
-            <a:avLst/>
-          </a:prstGeom>
-          <a:noFill/>
-          <a:ln/>
-        </p:spPr>
-        <p:txBody>
-          <a:bodyPr wrap="square" rtlCol="0" anchor="ctr"/>
-          <a:lstStyle/>
-          <a:p>
-            <a:pPr indent="0" marL="0">
-              <a:buNone/>
-            </a:pPr>
-            <a:r>
-              <a:rPr lang="en-US" sz="1100" b="1" dirty="0">
-                <a:solidFill>
-                  <a:srgbClr val="1C1F27"/>
-                </a:solidFill>
-                <a:latin typeface="Calibri" pitchFamily="34" charset="0"/>
-                <a:ea typeface="Calibri" pitchFamily="34" charset="-122"/>
-                <a:cs typeface="Calibri" pitchFamily="34" charset="-120"/>
-              </a:rPr>
-              <a:t>MessageTemplate</a:t>
-            </a:r>
-            <a:endParaRPr lang="en-US" sz="1100" dirty="0"/>
-          </a:p>
-        </p:txBody>
-      </p:sp>
-      <p:sp>
-        <p:nvSpPr>
-          <p:cNvPr id="61" name="Text 59"/>
-          <p:cNvSpPr/>
-          <p:nvPr/>
-        </p:nvSpPr>
-        <p:spPr>
-          <a:xfrm>
-            <a:off x="6748272" y="3529584"/>
-            <a:ext cx="2194560" cy="219456"/>
-          </a:xfrm>
-          <a:prstGeom prst="rect">
-            <a:avLst/>
-          </a:prstGeom>
-          <a:noFill/>
-          <a:ln/>
-        </p:spPr>
-        <p:txBody>
-          <a:bodyPr wrap="square" rtlCol="0" anchor="ctr"/>
-          <a:lstStyle/>
-          <a:p>
-            <a:pPr indent="0" marL="0">
-              <a:buNone/>
-            </a:pPr>
-            <a:r>
-              <a:rPr lang="en-US" sz="950" i="1" dirty="0">
-                <a:solidFill>
-                  <a:srgbClr val="5B6170"/>
-                </a:solidFill>
-                <a:latin typeface="Calibri" pitchFamily="34" charset="0"/>
-                <a:ea typeface="Calibri" pitchFamily="34" charset="-122"/>
-                <a:cs typeface="Calibri" pitchFamily="34" charset="-120"/>
-              </a:rPr>
-              <a:t>editable WA templates (§14.9)</a:t>
-            </a:r>
-            <a:endParaRPr lang="en-US" sz="950" dirty="0"/>
-          </a:p>
-        </p:txBody>
-      </p:sp>
-      <p:sp>
-        <p:nvSpPr>
-          <p:cNvPr id="62" name="Shape 60"/>
-          <p:cNvSpPr/>
-          <p:nvPr/>
-        </p:nvSpPr>
-        <p:spPr>
-          <a:xfrm>
-            <a:off x="6565392" y="3813048"/>
-            <a:ext cx="100584" cy="100584"/>
-          </a:xfrm>
-          <a:prstGeom prst="ellipse">
-            <a:avLst/>
-          </a:prstGeom>
-          <a:solidFill>
-            <a:srgbClr val="4A45E0"/>
-          </a:solidFill>
-          <a:ln/>
-        </p:spPr>
-      </p:sp>
-      <p:sp>
-        <p:nvSpPr>
-          <p:cNvPr id="63" name="Text 61"/>
-          <p:cNvSpPr/>
-          <p:nvPr/>
-        </p:nvSpPr>
-        <p:spPr>
-          <a:xfrm>
-            <a:off x="6748272" y="3767328"/>
-            <a:ext cx="2194560" cy="237744"/>
-          </a:xfrm>
-          <a:prstGeom prst="rect">
-            <a:avLst/>
-          </a:prstGeom>
-          <a:noFill/>
-          <a:ln/>
-        </p:spPr>
-        <p:txBody>
-          <a:bodyPr wrap="square" rtlCol="0" anchor="ctr"/>
-          <a:lstStyle/>
-          <a:p>
-            <a:pPr indent="0" marL="0">
-              <a:buNone/>
-            </a:pPr>
-            <a:r>
-              <a:rPr lang="en-US" sz="1100" b="1" dirty="0">
-                <a:solidFill>
-                  <a:srgbClr val="1C1F27"/>
-                </a:solidFill>
-                <a:latin typeface="Calibri" pitchFamily="34" charset="0"/>
-                <a:ea typeface="Calibri" pitchFamily="34" charset="-122"/>
-                <a:cs typeface="Calibri" pitchFamily="34" charset="-120"/>
-              </a:rPr>
-              <a:t>Dual Prisma schemas</a:t>
-            </a:r>
-            <a:endParaRPr lang="en-US" sz="1100" dirty="0"/>
-          </a:p>
-        </p:txBody>
-      </p:sp>
-      <p:sp>
-        <p:nvSpPr>
-          <p:cNvPr id="64" name="Text 62"/>
-          <p:cNvSpPr/>
-          <p:nvPr/>
-        </p:nvSpPr>
-        <p:spPr>
-          <a:xfrm>
-            <a:off x="6748272" y="3986784"/>
-            <a:ext cx="2194560" cy="219456"/>
-          </a:xfrm>
-          <a:prstGeom prst="rect">
-            <a:avLst/>
-          </a:prstGeom>
-          <a:noFill/>
-          <a:ln/>
-        </p:spPr>
-        <p:txBody>
-          <a:bodyPr wrap="square" rtlCol="0" anchor="ctr"/>
-          <a:lstStyle/>
-          <a:p>
-            <a:pPr indent="0" marL="0">
-              <a:buNone/>
-            </a:pPr>
-            <a:r>
-              <a:rPr lang="en-US" sz="950" i="1" dirty="0">
-                <a:solidFill>
-                  <a:srgbClr val="5B6170"/>
-                </a:solidFill>
-                <a:latin typeface="Calibri" pitchFamily="34" charset="0"/>
-                <a:ea typeface="Calibri" pitchFamily="34" charset="-122"/>
-                <a:cs typeface="Calibri" pitchFamily="34" charset="-120"/>
-              </a:rPr>
-              <a:t>SQLite dev · Postgres prod</a:t>
-            </a:r>
-            <a:endParaRPr lang="en-US" sz="950" dirty="0"/>
-          </a:p>
-        </p:txBody>
-      </p:sp>
-      <p:sp>
-        <p:nvSpPr>
-          <p:cNvPr id="65" name="Shape 63"/>
-          <p:cNvSpPr/>
-          <p:nvPr/>
-        </p:nvSpPr>
-        <p:spPr>
-          <a:xfrm>
-            <a:off x="6565392" y="4270248"/>
-            <a:ext cx="100584" cy="100584"/>
-          </a:xfrm>
-          <a:prstGeom prst="ellipse">
-            <a:avLst/>
-          </a:prstGeom>
-          <a:solidFill>
-            <a:srgbClr val="4A45E0"/>
-          </a:solidFill>
-          <a:ln/>
-        </p:spPr>
-      </p:sp>
-      <p:sp>
-        <p:nvSpPr>
-          <p:cNvPr id="66" name="Text 64"/>
-          <p:cNvSpPr/>
-          <p:nvPr/>
-        </p:nvSpPr>
-        <p:spPr>
-          <a:xfrm>
-            <a:off x="6748272" y="4224528"/>
-            <a:ext cx="2194560" cy="237744"/>
-          </a:xfrm>
-          <a:prstGeom prst="rect">
-            <a:avLst/>
-          </a:prstGeom>
-          <a:noFill/>
-          <a:ln/>
-        </p:spPr>
-        <p:txBody>
-          <a:bodyPr wrap="square" rtlCol="0" anchor="ctr"/>
-          <a:lstStyle/>
-          <a:p>
-            <a:pPr indent="0" marL="0">
-              <a:buNone/>
-            </a:pPr>
-            <a:r>
-              <a:rPr lang="en-US" sz="1100" b="1" dirty="0">
-                <a:solidFill>
-                  <a:srgbClr val="1C1F27"/>
-                </a:solidFill>
-                <a:latin typeface="Calibri" pitchFamily="34" charset="0"/>
-                <a:ea typeface="Calibri" pitchFamily="34" charset="-122"/>
-                <a:cs typeface="Calibri" pitchFamily="34" charset="-120"/>
-              </a:rPr>
-              <a:t>vercel-build script</a:t>
-            </a:r>
-            <a:endParaRPr lang="en-US" sz="1100" dirty="0"/>
-          </a:p>
-        </p:txBody>
-      </p:sp>
-      <p:sp>
-        <p:nvSpPr>
-          <p:cNvPr id="67" name="Text 65"/>
-          <p:cNvSpPr/>
-          <p:nvPr/>
-        </p:nvSpPr>
-        <p:spPr>
-          <a:xfrm>
-            <a:off x="6748272" y="4443984"/>
-            <a:ext cx="2194560" cy="219456"/>
-          </a:xfrm>
-          <a:prstGeom prst="rect">
-            <a:avLst/>
-          </a:prstGeom>
-          <a:noFill/>
-          <a:ln/>
-        </p:spPr>
-        <p:txBody>
-          <a:bodyPr wrap="square" rtlCol="0" anchor="ctr"/>
-          <a:lstStyle/>
-          <a:p>
-            <a:pPr indent="0" marL="0">
-              <a:buNone/>
-            </a:pPr>
-            <a:r>
-              <a:rPr lang="en-US" sz="950" i="1" dirty="0">
-                <a:solidFill>
-                  <a:srgbClr val="5B6170"/>
-                </a:solidFill>
-                <a:latin typeface="Calibri" pitchFamily="34" charset="0"/>
-                <a:ea typeface="Calibri" pitchFamily="34" charset="-122"/>
-                <a:cs typeface="Calibri" pitchFamily="34" charset="-120"/>
-              </a:rPr>
-              <a:t>generate + db push + next build</a:t>
-            </a:r>
-            <a:endParaRPr lang="en-US" sz="950" dirty="0"/>
-          </a:p>
-        </p:txBody>
-      </p:sp>
-      <p:sp>
-        <p:nvSpPr>
-          <p:cNvPr id="68" name="Shape 66"/>
-          <p:cNvSpPr/>
-          <p:nvPr/>
-        </p:nvSpPr>
-        <p:spPr>
-          <a:xfrm>
-            <a:off x="6565392" y="4727448"/>
-            <a:ext cx="100584" cy="100584"/>
-          </a:xfrm>
-          <a:prstGeom prst="ellipse">
-            <a:avLst/>
-          </a:prstGeom>
-          <a:solidFill>
-            <a:srgbClr val="4A45E0"/>
-          </a:solidFill>
-          <a:ln/>
-        </p:spPr>
-      </p:sp>
-      <p:sp>
-        <p:nvSpPr>
-          <p:cNvPr id="69" name="Text 67"/>
-          <p:cNvSpPr/>
-          <p:nvPr/>
-        </p:nvSpPr>
-        <p:spPr>
-          <a:xfrm>
-            <a:off x="6748272" y="4681728"/>
-            <a:ext cx="2194560" cy="237744"/>
-          </a:xfrm>
-          <a:prstGeom prst="rect">
-            <a:avLst/>
-          </a:prstGeom>
-          <a:noFill/>
-          <a:ln/>
-        </p:spPr>
-        <p:txBody>
-          <a:bodyPr wrap="square" rtlCol="0" anchor="ctr"/>
-          <a:lstStyle/>
-          <a:p>
-            <a:pPr indent="0" marL="0">
-              <a:buNone/>
-            </a:pPr>
-            <a:r>
-              <a:rPr lang="en-US" sz="1100" b="1" dirty="0">
-                <a:solidFill>
-                  <a:srgbClr val="1C1F27"/>
-                </a:solidFill>
-                <a:latin typeface="Calibri" pitchFamily="34" charset="0"/>
-                <a:ea typeface="Calibri" pitchFamily="34" charset="-122"/>
-                <a:cs typeface="Calibri" pitchFamily="34" charset="-120"/>
-              </a:rPr>
-              <a:t>Neon Singapore direct URL</a:t>
-            </a:r>
-            <a:endParaRPr lang="en-US" sz="1100" dirty="0"/>
-          </a:p>
-        </p:txBody>
-      </p:sp>
-      <p:sp>
-        <p:nvSpPr>
-          <p:cNvPr id="70" name="Text 68"/>
-          <p:cNvSpPr/>
-          <p:nvPr/>
-        </p:nvSpPr>
-        <p:spPr>
-          <a:xfrm>
-            <a:off x="6748272" y="4901184"/>
-            <a:ext cx="2194560" cy="219456"/>
-          </a:xfrm>
-          <a:prstGeom prst="rect">
-            <a:avLst/>
-          </a:prstGeom>
-          <a:noFill/>
-          <a:ln/>
-        </p:spPr>
-        <p:txBody>
-          <a:bodyPr wrap="square" rtlCol="0" anchor="ctr"/>
-          <a:lstStyle/>
-          <a:p>
-            <a:pPr indent="0" marL="0">
-              <a:buNone/>
-            </a:pPr>
-            <a:r>
-              <a:rPr lang="en-US" sz="950" i="1" dirty="0">
-                <a:solidFill>
-                  <a:srgbClr val="5B6170"/>
-                </a:solidFill>
-                <a:latin typeface="Calibri" pitchFamily="34" charset="0"/>
-                <a:ea typeface="Calibri" pitchFamily="34" charset="-122"/>
-                <a:cs typeface="Calibri" pitchFamily="34" charset="-120"/>
-              </a:rPr>
-              <a:t>same region as fns (latency fix)</a:t>
-            </a:r>
-            <a:endParaRPr lang="en-US" sz="950" dirty="0"/>
-          </a:p>
-        </p:txBody>
-      </p:sp>
-      <p:sp>
-        <p:nvSpPr>
-          <p:cNvPr id="71" name="Shape 69"/>
-          <p:cNvSpPr/>
-          <p:nvPr/>
-        </p:nvSpPr>
-        <p:spPr>
-          <a:xfrm>
-            <a:off x="9372600" y="1828800"/>
-            <a:ext cx="2361895" cy="3566160"/>
+              <a:t>The lead's name and company drop in automatically. The team never copy-pastes phone numbers — and every contact is recorded in the history.</a:t>
+            </a:r>
+            <a:endParaRPr lang="en-US" sz="1000" dirty="0"/>
+          </a:p>
+        </p:txBody>
+      </p:sp>
+      <p:sp>
+        <p:nvSpPr>
+          <p:cNvPr id="44" name="Shape 42"/>
+          <p:cNvSpPr/>
+          <p:nvPr/>
+        </p:nvSpPr>
+        <p:spPr>
+          <a:xfrm>
+            <a:off x="3291840" y="3520440"/>
+            <a:ext cx="365760" cy="0"/>
+          </a:xfrm>
+          <a:prstGeom prst="line">
+            <a:avLst/>
+          </a:prstGeom>
+          <a:noFill/>
+          <a:ln w="38100">
+            <a:solidFill>
+              <a:srgbClr val="4A45E0"/>
+            </a:solidFill>
+            <a:prstDash val="solid"/>
+            <a:tailEnd type="triangle"/>
+          </a:ln>
+        </p:spPr>
+      </p:sp>
+      <p:sp>
+        <p:nvSpPr>
+          <p:cNvPr id="45" name="Shape 43"/>
+          <p:cNvSpPr/>
+          <p:nvPr/>
+        </p:nvSpPr>
+        <p:spPr>
+          <a:xfrm>
+            <a:off x="8503920" y="2628900"/>
+            <a:ext cx="365760" cy="0"/>
+          </a:xfrm>
+          <a:prstGeom prst="line">
+            <a:avLst/>
+          </a:prstGeom>
+          <a:noFill/>
+          <a:ln w="31750">
+            <a:solidFill>
+              <a:srgbClr val="4A45E0"/>
+            </a:solidFill>
+            <a:prstDash val="solid"/>
+            <a:tailEnd type="triangle"/>
+          </a:ln>
+        </p:spPr>
+      </p:sp>
+      <p:sp>
+        <p:nvSpPr>
+          <p:cNvPr id="46" name="Shape 44"/>
+          <p:cNvSpPr/>
+          <p:nvPr/>
+        </p:nvSpPr>
+        <p:spPr>
+          <a:xfrm>
+            <a:off x="8503920" y="4411980"/>
+            <a:ext cx="365760" cy="0"/>
+          </a:xfrm>
+          <a:prstGeom prst="line">
+            <a:avLst/>
+          </a:prstGeom>
+          <a:noFill/>
+          <a:ln w="31750">
+            <a:solidFill>
+              <a:srgbClr val="4A45E0"/>
+            </a:solidFill>
+            <a:prstDash val="solid"/>
+            <a:tailEnd type="triangle"/>
+          </a:ln>
+        </p:spPr>
+      </p:sp>
+      <p:sp>
+        <p:nvSpPr>
+          <p:cNvPr id="47" name="Shape 45"/>
+          <p:cNvSpPr/>
+          <p:nvPr/>
+        </p:nvSpPr>
+        <p:spPr>
+          <a:xfrm>
+            <a:off x="457200" y="5532120"/>
+            <a:ext cx="3636264" cy="914400"/>
           </a:xfrm>
           <a:prstGeom prst="rect">
             <a:avLst>
-              <a:gd name="adj" fmla="val 3097"/>
+              <a:gd name="adj" fmla="val 8000"/>
             </a:avLst>
           </a:prstGeom>
           <a:solidFill>
@@ -7658,14 +6874,14 @@
       </p:sp>
       <p:sp>
         <p:nvSpPr>
-          <p:cNvPr id="72" name="Shape 70"/>
-          <p:cNvSpPr/>
-          <p:nvPr/>
-        </p:nvSpPr>
-        <p:spPr>
-          <a:xfrm>
-            <a:off x="9372600" y="1828800"/>
-            <a:ext cx="2361895" cy="109728"/>
+          <p:cNvPr id="48" name="Shape 46"/>
+          <p:cNvSpPr/>
+          <p:nvPr/>
+        </p:nvSpPr>
+        <p:spPr>
+          <a:xfrm>
+            <a:off x="457200" y="5532120"/>
+            <a:ext cx="3636264" cy="109728"/>
           </a:xfrm>
           <a:prstGeom prst="rect">
             <a:avLst>
@@ -7673,6 +6889,133 @@
             </a:avLst>
           </a:prstGeom>
           <a:solidFill>
+            <a:srgbClr val="4A45E0"/>
+          </a:solidFill>
+          <a:ln/>
+        </p:spPr>
+      </p:sp>
+      <p:sp>
+        <p:nvSpPr>
+          <p:cNvPr id="49" name="Text 47"/>
+          <p:cNvSpPr/>
+          <p:nvPr/>
+        </p:nvSpPr>
+        <p:spPr>
+          <a:xfrm>
+            <a:off x="621792" y="5678424"/>
+            <a:ext cx="3307080" cy="329184"/>
+          </a:xfrm>
+          <a:prstGeom prst="rect">
+            <a:avLst/>
+          </a:prstGeom>
+          <a:noFill/>
+          <a:ln/>
+        </p:spPr>
+        <p:txBody>
+          <a:bodyPr wrap="square" rtlCol="0" anchor="ctr"/>
+          <a:lstStyle/>
+          <a:p>
+            <a:pPr indent="0" marL="0">
+              <a:buNone/>
+            </a:pPr>
+            <a:r>
+              <a:rPr lang="en-US" sz="1200" b="1" spc="120" kern="0" dirty="0">
+                <a:solidFill>
+                  <a:srgbClr val="1C1F27"/>
+                </a:solidFill>
+                <a:latin typeface="Calibri" pitchFamily="34" charset="0"/>
+                <a:ea typeface="Calibri" pitchFamily="34" charset="-122"/>
+                <a:cs typeface="Calibri" pitchFamily="34" charset="-120"/>
+              </a:rPr>
+              <a:t>FAST IN THE FIELD</a:t>
+            </a:r>
+            <a:endParaRPr lang="en-US" sz="1200" dirty="0"/>
+          </a:p>
+        </p:txBody>
+      </p:sp>
+      <p:sp>
+        <p:nvSpPr>
+          <p:cNvPr id="50" name="Text 48"/>
+          <p:cNvSpPr/>
+          <p:nvPr/>
+        </p:nvSpPr>
+        <p:spPr>
+          <a:xfrm>
+            <a:off x="640080" y="5989320"/>
+            <a:ext cx="3316224" cy="457200"/>
+          </a:xfrm>
+          <a:prstGeom prst="rect">
+            <a:avLst/>
+          </a:prstGeom>
+          <a:noFill/>
+          <a:ln/>
+        </p:spPr>
+        <p:txBody>
+          <a:bodyPr wrap="square" rtlCol="0" anchor="t"/>
+          <a:lstStyle/>
+          <a:p>
+            <a:pPr indent="0" marL="0">
+              <a:buNone/>
+            </a:pPr>
+            <a:r>
+              <a:rPr lang="en-US" sz="1000" dirty="0">
+                <a:solidFill>
+                  <a:srgbClr val="5B6170"/>
+                </a:solidFill>
+                <a:latin typeface="Calibri" pitchFamily="34" charset="0"/>
+                <a:ea typeface="Calibri" pitchFamily="34" charset="-122"/>
+                <a:cs typeface="Calibri" pitchFamily="34" charset="-120"/>
+              </a:rPr>
+              <a:t>Hosted in Singapore — quick to open on any phone or laptop with an internet connection.</a:t>
+            </a:r>
+            <a:endParaRPr lang="en-US" sz="1000" dirty="0"/>
+          </a:p>
+        </p:txBody>
+      </p:sp>
+      <p:sp>
+        <p:nvSpPr>
+          <p:cNvPr id="51" name="Shape 49"/>
+          <p:cNvSpPr/>
+          <p:nvPr/>
+        </p:nvSpPr>
+        <p:spPr>
+          <a:xfrm>
+            <a:off x="4276344" y="5532120"/>
+            <a:ext cx="3636264" cy="914400"/>
+          </a:xfrm>
+          <a:prstGeom prst="rect">
+            <a:avLst>
+              <a:gd name="adj" fmla="val 8000"/>
+            </a:avLst>
+          </a:prstGeom>
+          <a:solidFill>
+            <a:srgbClr val="FFFFFF"/>
+          </a:solidFill>
+          <a:ln w="9525">
+            <a:solidFill>
+              <a:srgbClr val="E6E8EE"/>
+            </a:solidFill>
+            <a:prstDash val="solid"/>
+          </a:ln>
+        </p:spPr>
+      </p:sp>
+      <p:sp>
+        <p:nvSpPr>
+          <p:cNvPr id="52" name="Shape 50"/>
+          <p:cNvSpPr/>
+          <p:nvPr/>
+        </p:nvSpPr>
+        <p:spPr>
+          <a:xfrm>
+            <a:off x="4276344" y="5532120"/>
+            <a:ext cx="3636264" cy="109728"/>
+          </a:xfrm>
+          <a:prstGeom prst="rect">
+            <a:avLst>
+              <a:gd name="adj" fmla="val 66667"/>
+            </a:avLst>
+          </a:prstGeom>
+          <a:solidFill>
             <a:srgbClr val="17915B"/>
           </a:solidFill>
           <a:ln/>
@@ -7680,14 +7023,14 @@
       </p:sp>
       <p:sp>
         <p:nvSpPr>
-          <p:cNvPr id="73" name="Text 71"/>
-          <p:cNvSpPr/>
-          <p:nvPr/>
-        </p:nvSpPr>
-        <p:spPr>
-          <a:xfrm>
-            <a:off x="9537192" y="1975104"/>
-            <a:ext cx="2032711" cy="329184"/>
+          <p:cNvPr id="53" name="Text 51"/>
+          <p:cNvSpPr/>
+          <p:nvPr/>
+        </p:nvSpPr>
+        <p:spPr>
+          <a:xfrm>
+            <a:off x="4440936" y="5678424"/>
+            <a:ext cx="3307080" cy="329184"/>
           </a:xfrm>
           <a:prstGeom prst="rect">
             <a:avLst/>
@@ -7711,7 +7054,7 @@
                 <a:ea typeface="Calibri" pitchFamily="34" charset="-122"/>
                 <a:cs typeface="Calibri" pitchFamily="34" charset="-120"/>
               </a:rPr>
-              <a:t>EXTERNAL</a:t>
+              <a:t>NOTHING IS LOST</a:t>
             </a:r>
             <a:endParaRPr lang="en-US" sz="1200" dirty="0"/>
           </a:p>
@@ -7719,53 +7062,14 @@
       </p:sp>
       <p:sp>
         <p:nvSpPr>
-          <p:cNvPr id="74" name="Text 72"/>
-          <p:cNvSpPr/>
-          <p:nvPr/>
-        </p:nvSpPr>
-        <p:spPr>
-          <a:xfrm>
-            <a:off x="9537192" y="2423160"/>
-            <a:ext cx="2087575" cy="274320"/>
-          </a:xfrm>
-          <a:prstGeom prst="rect">
-            <a:avLst/>
-          </a:prstGeom>
-          <a:noFill/>
-          <a:ln/>
-        </p:spPr>
-        <p:txBody>
-          <a:bodyPr wrap="square" rtlCol="0" anchor="ctr"/>
-          <a:lstStyle/>
-          <a:p>
-            <a:pPr indent="0" marL="0">
-              <a:buNone/>
-            </a:pPr>
-            <a:r>
-              <a:rPr lang="en-US" sz="1200" b="1" dirty="0">
-                <a:solidFill>
-                  <a:srgbClr val="1C1F27"/>
-                </a:solidFill>
-                <a:latin typeface="Calibri" pitchFamily="34" charset="0"/>
-                <a:ea typeface="Calibri" pitchFamily="34" charset="-122"/>
-                <a:cs typeface="Calibri" pitchFamily="34" charset="-120"/>
-              </a:rPr>
-              <a:t>wa.me deep link</a:t>
-            </a:r>
-            <a:endParaRPr lang="en-US" sz="1200" dirty="0"/>
-          </a:p>
-        </p:txBody>
-      </p:sp>
-      <p:sp>
-        <p:nvSpPr>
-          <p:cNvPr id="75" name="Text 73"/>
-          <p:cNvSpPr/>
-          <p:nvPr/>
-        </p:nvSpPr>
-        <p:spPr>
-          <a:xfrm>
-            <a:off x="9537192" y="2743200"/>
-            <a:ext cx="2087575" cy="2560320"/>
+          <p:cNvPr id="54" name="Text 52"/>
+          <p:cNvSpPr/>
+          <p:nvPr/>
+        </p:nvSpPr>
+        <p:spPr>
+          <a:xfrm>
+            <a:off x="4459224" y="5989320"/>
+            <a:ext cx="3316224" cy="457200"/>
           </a:xfrm>
           <a:prstGeom prst="rect">
             <a:avLst/>
@@ -7781,7 +7085,7 @@
               <a:buNone/>
             </a:pPr>
             <a:r>
-              <a:rPr lang="en-US" sz="950" dirty="0">
+              <a:rPr lang="en-US" sz="1000" dirty="0">
                 <a:solidFill>
                   <a:srgbClr val="5B6170"/>
                 </a:solidFill>
@@ -7789,131 +7093,110 @@
                 <a:ea typeface="Calibri" pitchFamily="34" charset="-122"/>
                 <a:cs typeface="Calibri" pitchFamily="34" charset="-120"/>
               </a:rPr>
-              <a:t>Server builds https://wa.me/&lt;phone&gt;?text=&lt;msg&gt;; the client opens it in a new tab. WhatsApp itself handles delivery — the app logs INTENT (a WHATSAPP_CONTACT activity), not proof of delivery. ADR-0002 documents the upgrade path to the WhatsApp Business Cloud API for delivery receipts.</a:t>
-            </a:r>
-            <a:endParaRPr lang="en-US" sz="950" dirty="0"/>
-          </a:p>
-        </p:txBody>
-      </p:sp>
-      <p:sp>
-        <p:nvSpPr>
-          <p:cNvPr id="76" name="Shape 74"/>
-          <p:cNvSpPr/>
-          <p:nvPr/>
-        </p:nvSpPr>
-        <p:spPr>
-          <a:xfrm>
-            <a:off x="3108960" y="3611880"/>
-            <a:ext cx="320040" cy="0"/>
-          </a:xfrm>
-          <a:prstGeom prst="line">
-            <a:avLst/>
-          </a:prstGeom>
-          <a:noFill/>
-          <a:ln w="19050">
+              <a:t>Every change is recorded and dated. Later, reports build themselves from that record.</a:t>
+            </a:r>
+            <a:endParaRPr lang="en-US" sz="1000" dirty="0"/>
+          </a:p>
+        </p:txBody>
+      </p:sp>
+      <p:sp>
+        <p:nvSpPr>
+          <p:cNvPr id="55" name="Shape 53"/>
+          <p:cNvSpPr/>
+          <p:nvPr/>
+        </p:nvSpPr>
+        <p:spPr>
+          <a:xfrm>
+            <a:off x="8095488" y="5532120"/>
+            <a:ext cx="3636264" cy="914400"/>
+          </a:xfrm>
+          <a:prstGeom prst="rect">
+            <a:avLst>
+              <a:gd name="adj" fmla="val 8000"/>
+            </a:avLst>
+          </a:prstGeom>
+          <a:solidFill>
+            <a:srgbClr val="FFFFFF"/>
+          </a:solidFill>
+          <a:ln w="9525">
             <a:solidFill>
-              <a:srgbClr val="5B6170"/>
+              <a:srgbClr val="E6E8EE"/>
             </a:solidFill>
             <a:prstDash val="solid"/>
-            <a:tailEnd type="triangle"/>
           </a:ln>
         </p:spPr>
       </p:sp>
       <p:sp>
         <p:nvSpPr>
-          <p:cNvPr id="77" name="Shape 75"/>
-          <p:cNvSpPr/>
-          <p:nvPr/>
-        </p:nvSpPr>
-        <p:spPr>
-          <a:xfrm>
-            <a:off x="6080760" y="3611880"/>
-            <a:ext cx="320040" cy="0"/>
-          </a:xfrm>
-          <a:prstGeom prst="line">
-            <a:avLst/>
-          </a:prstGeom>
-          <a:noFill/>
-          <a:ln w="19050">
-            <a:solidFill>
-              <a:srgbClr val="5B6170"/>
-            </a:solidFill>
-            <a:prstDash val="solid"/>
-            <a:tailEnd type="triangle"/>
-          </a:ln>
-        </p:spPr>
-      </p:sp>
-      <p:sp>
-        <p:nvSpPr>
-          <p:cNvPr id="78" name="Shape 76"/>
-          <p:cNvSpPr/>
-          <p:nvPr/>
-        </p:nvSpPr>
-        <p:spPr>
-          <a:xfrm>
-            <a:off x="457200" y="5577840"/>
-            <a:ext cx="11274552" cy="777240"/>
+          <p:cNvPr id="56" name="Shape 54"/>
+          <p:cNvSpPr/>
+          <p:nvPr/>
+        </p:nvSpPr>
+        <p:spPr>
+          <a:xfrm>
+            <a:off x="8095488" y="5532120"/>
+            <a:ext cx="3636264" cy="109728"/>
           </a:xfrm>
           <a:prstGeom prst="rect">
             <a:avLst>
-              <a:gd name="adj" fmla="val 7059"/>
+              <a:gd name="adj" fmla="val 66667"/>
             </a:avLst>
           </a:prstGeom>
           <a:solidFill>
-            <a:srgbClr val="ECEBFB"/>
+            <a:srgbClr val="0E9AA7"/>
           </a:solidFill>
           <a:ln/>
         </p:spPr>
       </p:sp>
       <p:sp>
         <p:nvSpPr>
-          <p:cNvPr id="79" name="Text 77"/>
-          <p:cNvSpPr/>
-          <p:nvPr/>
-        </p:nvSpPr>
-        <p:spPr>
-          <a:xfrm>
-            <a:off x="640080" y="5650992"/>
-            <a:ext cx="10972800" cy="256032"/>
-          </a:xfrm>
-          <a:prstGeom prst="rect">
-            <a:avLst/>
-          </a:prstGeom>
-          <a:noFill/>
-          <a:ln/>
-        </p:spPr>
-        <p:txBody>
-          <a:bodyPr wrap="square" rtlCol="0" anchor="ctr"/>
-          <a:lstStyle/>
-          <a:p>
-            <a:pPr indent="0" marL="0">
-              <a:buNone/>
-            </a:pPr>
-            <a:r>
-              <a:rPr lang="en-US" sz="1050" b="1" spc="100" kern="0" dirty="0">
-                <a:solidFill>
-                  <a:srgbClr val="4A45E0"/>
-                </a:solidFill>
-                <a:latin typeface="Calibri" pitchFamily="34" charset="0"/>
-                <a:ea typeface="Calibri" pitchFamily="34" charset="-122"/>
-                <a:cs typeface="Calibri" pitchFamily="34" charset="-120"/>
-              </a:rPr>
-              <a:t>Verification lap  ·  every commit that touches app code</a:t>
-            </a:r>
-            <a:endParaRPr lang="en-US" sz="1050" dirty="0"/>
-          </a:p>
-        </p:txBody>
-      </p:sp>
-      <p:sp>
-        <p:nvSpPr>
-          <p:cNvPr id="80" name="Text 78"/>
-          <p:cNvSpPr/>
-          <p:nvPr/>
-        </p:nvSpPr>
-        <p:spPr>
-          <a:xfrm>
-            <a:off x="640080" y="5925312"/>
-            <a:ext cx="10972800" cy="365760"/>
+          <p:cNvPr id="57" name="Text 55"/>
+          <p:cNvSpPr/>
+          <p:nvPr/>
+        </p:nvSpPr>
+        <p:spPr>
+          <a:xfrm>
+            <a:off x="8260080" y="5678424"/>
+            <a:ext cx="3307080" cy="329184"/>
+          </a:xfrm>
+          <a:prstGeom prst="rect">
+            <a:avLst/>
+          </a:prstGeom>
+          <a:noFill/>
+          <a:ln/>
+        </p:spPr>
+        <p:txBody>
+          <a:bodyPr wrap="square" rtlCol="0" anchor="ctr"/>
+          <a:lstStyle/>
+          <a:p>
+            <a:pPr indent="0" marL="0">
+              <a:buNone/>
+            </a:pPr>
+            <a:r>
+              <a:rPr lang="en-US" sz="1200" b="1" spc="120" kern="0" dirty="0">
+                <a:solidFill>
+                  <a:srgbClr val="1C1F27"/>
+                </a:solidFill>
+                <a:latin typeface="Calibri" pitchFamily="34" charset="0"/>
+                <a:ea typeface="Calibri" pitchFamily="34" charset="-122"/>
+                <a:cs typeface="Calibri" pitchFamily="34" charset="-120"/>
+              </a:rPr>
+              <a:t>WORKS WITH EXISTING TOOLS</a:t>
+            </a:r>
+            <a:endParaRPr lang="en-US" sz="1200" dirty="0"/>
+          </a:p>
+        </p:txBody>
+      </p:sp>
+      <p:sp>
+        <p:nvSpPr>
+          <p:cNvPr id="58" name="Text 56"/>
+          <p:cNvSpPr/>
+          <p:nvPr/>
+        </p:nvSpPr>
+        <p:spPr>
+          <a:xfrm>
+            <a:off x="8278368" y="5989320"/>
+            <a:ext cx="3316224" cy="457200"/>
           </a:xfrm>
           <a:prstGeom prst="rect">
             <a:avLst/>
@@ -7931,13 +7214,13 @@
             <a:r>
               <a:rPr lang="en-US" sz="1000" dirty="0">
                 <a:solidFill>
-                  <a:srgbClr val="1C1F27"/>
-                </a:solidFill>
-                <a:latin typeface="Calibri" pitchFamily="34" charset="0"/>
-                <a:ea typeface="Calibri" pitchFamily="34" charset="-122"/>
-                <a:cs typeface="Calibri" pitchFamily="34" charset="-120"/>
-              </a:rPr>
-              <a:t>npm test   →  64 unit tests, pure lib modules       npx tsc --noEmit   →  strict type-check clean       npm run build   →  Next.js production build clean</a:t>
+                  <a:srgbClr val="5B6170"/>
+                </a:solidFill>
+                <a:latin typeface="Calibri" pitchFamily="34" charset="0"/>
+                <a:ea typeface="Calibri" pitchFamily="34" charset="-122"/>
+                <a:cs typeface="Calibri" pitchFamily="34" charset="-120"/>
+              </a:rPr>
+              <a:t>Uses WhatsApp the team already knows — no new app to learn, no new phone number to give customers.</a:t>
             </a:r>
             <a:endParaRPr lang="en-US" sz="1000" dirty="0"/>
           </a:p>
